--- a/cours/Module TIC/Série Officielle 01-10/Cours_TIC_03_Windows_FR.pptx
+++ b/cours/Module TIC/Série Officielle 01-10/Cours_TIC_03_Windows_FR.pptx
@@ -2856,7 +2856,7 @@
           <a:solidFill>
             <a:schemeClr val="tx1"/>
           </a:solidFill>
-          <a:latin typeface="+mj-lt"/>
+          <a:latin typeface="Poppins"/>
           <a:ea typeface="+mj-ea"/>
           <a:cs typeface="+mj-cs"/>
         </a:defRPr>
@@ -2873,7 +2873,7 @@
           <a:solidFill>
             <a:schemeClr val="tx1"/>
           </a:solidFill>
-          <a:latin typeface="+mn-lt"/>
+          <a:latin typeface="Poppins"/>
           <a:ea typeface="+mn-ea"/>
           <a:cs typeface="+mn-cs"/>
         </a:defRPr>
@@ -2888,7 +2888,7 @@
           <a:solidFill>
             <a:schemeClr val="tx1"/>
           </a:solidFill>
-          <a:latin typeface="+mn-lt"/>
+          <a:latin typeface="Poppins"/>
           <a:ea typeface="+mn-ea"/>
           <a:cs typeface="+mn-cs"/>
         </a:defRPr>
@@ -2903,7 +2903,7 @@
           <a:solidFill>
             <a:schemeClr val="tx1"/>
           </a:solidFill>
-          <a:latin typeface="+mn-lt"/>
+          <a:latin typeface="Poppins"/>
           <a:ea typeface="+mn-ea"/>
           <a:cs typeface="+mn-cs"/>
         </a:defRPr>
@@ -2918,7 +2918,7 @@
           <a:solidFill>
             <a:schemeClr val="tx1"/>
           </a:solidFill>
-          <a:latin typeface="+mn-lt"/>
+          <a:latin typeface="Poppins"/>
           <a:ea typeface="+mn-ea"/>
           <a:cs typeface="+mn-cs"/>
         </a:defRPr>
@@ -2933,7 +2933,7 @@
           <a:solidFill>
             <a:schemeClr val="tx1"/>
           </a:solidFill>
-          <a:latin typeface="+mn-lt"/>
+          <a:latin typeface="Poppins"/>
           <a:ea typeface="+mn-ea"/>
           <a:cs typeface="+mn-cs"/>
         </a:defRPr>
@@ -2948,7 +2948,7 @@
           <a:solidFill>
             <a:schemeClr val="tx1"/>
           </a:solidFill>
-          <a:latin typeface="+mn-lt"/>
+          <a:latin typeface="Poppins"/>
           <a:ea typeface="+mn-ea"/>
           <a:cs typeface="+mn-cs"/>
         </a:defRPr>
@@ -2963,7 +2963,7 @@
           <a:solidFill>
             <a:schemeClr val="tx1"/>
           </a:solidFill>
-          <a:latin typeface="+mn-lt"/>
+          <a:latin typeface="Poppins"/>
           <a:ea typeface="+mn-ea"/>
           <a:cs typeface="+mn-cs"/>
         </a:defRPr>
@@ -2978,7 +2978,7 @@
           <a:solidFill>
             <a:schemeClr val="tx1"/>
           </a:solidFill>
-          <a:latin typeface="+mn-lt"/>
+          <a:latin typeface="Poppins"/>
           <a:ea typeface="+mn-ea"/>
           <a:cs typeface="+mn-cs"/>
         </a:defRPr>
@@ -2993,7 +2993,7 @@
           <a:solidFill>
             <a:schemeClr val="tx1"/>
           </a:solidFill>
-          <a:latin typeface="+mn-lt"/>
+          <a:latin typeface="Poppins"/>
           <a:ea typeface="+mn-ea"/>
           <a:cs typeface="+mn-cs"/>
         </a:defRPr>
@@ -3008,7 +3008,7 @@
           <a:solidFill>
             <a:schemeClr val="tx1"/>
           </a:solidFill>
-          <a:latin typeface="+mn-lt"/>
+          <a:latin typeface="Poppins"/>
           <a:ea typeface="+mn-ea"/>
           <a:cs typeface="+mn-cs"/>
         </a:defRPr>
@@ -3018,7 +3018,7 @@
           <a:solidFill>
             <a:schemeClr val="tx1"/>
           </a:solidFill>
-          <a:latin typeface="+mn-lt"/>
+          <a:latin typeface="Poppins"/>
           <a:ea typeface="+mn-ea"/>
           <a:cs typeface="+mn-cs"/>
         </a:defRPr>
@@ -3028,7 +3028,7 @@
           <a:solidFill>
             <a:schemeClr val="tx1"/>
           </a:solidFill>
-          <a:latin typeface="+mn-lt"/>
+          <a:latin typeface="Poppins"/>
           <a:ea typeface="+mn-ea"/>
           <a:cs typeface="+mn-cs"/>
         </a:defRPr>
@@ -3038,7 +3038,7 @@
           <a:solidFill>
             <a:schemeClr val="tx1"/>
           </a:solidFill>
-          <a:latin typeface="+mn-lt"/>
+          <a:latin typeface="Poppins"/>
           <a:ea typeface="+mn-ea"/>
           <a:cs typeface="+mn-cs"/>
         </a:defRPr>
@@ -3048,7 +3048,7 @@
           <a:solidFill>
             <a:schemeClr val="tx1"/>
           </a:solidFill>
-          <a:latin typeface="+mn-lt"/>
+          <a:latin typeface="Poppins"/>
           <a:ea typeface="+mn-ea"/>
           <a:cs typeface="+mn-cs"/>
         </a:defRPr>
@@ -3058,7 +3058,7 @@
           <a:solidFill>
             <a:schemeClr val="tx1"/>
           </a:solidFill>
-          <a:latin typeface="+mn-lt"/>
+          <a:latin typeface="Poppins"/>
           <a:ea typeface="+mn-ea"/>
           <a:cs typeface="+mn-cs"/>
         </a:defRPr>
@@ -3068,7 +3068,7 @@
           <a:solidFill>
             <a:schemeClr val="tx1"/>
           </a:solidFill>
-          <a:latin typeface="+mn-lt"/>
+          <a:latin typeface="Poppins"/>
           <a:ea typeface="+mn-ea"/>
           <a:cs typeface="+mn-cs"/>
         </a:defRPr>
@@ -3078,7 +3078,7 @@
           <a:solidFill>
             <a:schemeClr val="tx1"/>
           </a:solidFill>
-          <a:latin typeface="+mn-lt"/>
+          <a:latin typeface="Poppins"/>
           <a:ea typeface="+mn-ea"/>
           <a:cs typeface="+mn-cs"/>
         </a:defRPr>
@@ -3088,7 +3088,7 @@
           <a:solidFill>
             <a:schemeClr val="tx1"/>
           </a:solidFill>
-          <a:latin typeface="+mn-lt"/>
+          <a:latin typeface="Poppins"/>
           <a:ea typeface="+mn-ea"/>
           <a:cs typeface="+mn-cs"/>
         </a:defRPr>
@@ -3103,9 +3103,7 @@
   <p:cSld>
     <p:bg>
       <p:bgPr>
-        <a:solidFill>
-          <a:srgbClr val="0B3D2E"/>
-        </a:solidFill>
+        <a:solidFill>val="004A38"/&gt;</a:solidFill>
         <a:effectLst/>
       </p:bgPr>
     </p:bg>
@@ -3130,9 +3128,7 @@
           <a:prstGeom prst="rect">
             <a:avLst/>
           </a:prstGeom>
-          <a:solidFill>
-            <a:srgbClr val="146B4A"/>
-          </a:solidFill>
+          <a:solidFill>val="007A55"/&gt;</a:solidFill>
           <a:ln>
             <a:noFill/>
           </a:ln>
@@ -3174,9 +3170,7 @@
           <a:prstGeom prst="rect">
             <a:avLst/>
           </a:prstGeom>
-          <a:solidFill>
-            <a:srgbClr val="FFD700"/>
-          </a:solidFill>
+          <a:solidFill>val="F0B429"/&gt;</a:solidFill>
           <a:ln>
             <a:noFill/>
           </a:ln>
@@ -3218,9 +3212,7 @@
           <a:prstGeom prst="rect">
             <a:avLst/>
           </a:prstGeom>
-          <a:solidFill>
-            <a:srgbClr val="FFD700"/>
-          </a:solidFill>
+          <a:solidFill>val="F0B429"/&gt;</a:solidFill>
           <a:ln>
             <a:noFill/>
           </a:ln>
@@ -3262,9 +3254,7 @@
           <a:prstGeom prst="rect">
             <a:avLst/>
           </a:prstGeom>
-          <a:solidFill>
-            <a:srgbClr val="146B4A"/>
-          </a:solidFill>
+          <a:solidFill>val="007A55"/&gt;</a:solidFill>
           <a:ln>
             <a:noFill/>
           </a:ln>
@@ -3306,9 +3296,7 @@
           <a:prstGeom prst="rect">
             <a:avLst/>
           </a:prstGeom>
-          <a:solidFill>
-            <a:srgbClr val="FFD700"/>
-          </a:solidFill>
+          <a:solidFill>val="F0B429"/&gt;</a:solidFill>
           <a:ln>
             <a:noFill/>
           </a:ln>
@@ -3361,10 +3349,8 @@
             <a:pPr algn="ctr"/>
             <a:r>
               <a:rPr sz="4000" b="1" i="0">
-                <a:solidFill>
-                  <a:srgbClr val="FFD700"/>
-                </a:solidFill>
-                <a:latin typeface="Calibri"/>
+                <a:solidFill>val="F0B429"/&gt;</a:solidFill>
+                <a:latin typeface="Poppins"/>
               </a:rPr>
               <a:t>COURS TIC 03</a:t>
             </a:r>
@@ -3396,10 +3382,8 @@
             <a:pPr algn="ctr"/>
             <a:r>
               <a:rPr sz="3000" b="1" i="0">
-                <a:solidFill>
-                  <a:srgbClr val="FFFFFF"/>
-                </a:solidFill>
-                <a:latin typeface="Calibri"/>
+                <a:solidFill>val="FFFFFF"/&gt;</a:solidFill>
+                <a:latin typeface="Poppins"/>
               </a:rPr>
               <a:t>Le Système d'Exploitation Windows</a:t>
             </a:r>
@@ -3420,9 +3404,7 @@
           <a:prstGeom prst="rect">
             <a:avLst/>
           </a:prstGeom>
-          <a:solidFill>
-            <a:srgbClr val="146B4A"/>
-          </a:solidFill>
+          <a:solidFill>val="007A55"/&gt;</a:solidFill>
           <a:ln>
             <a:noFill/>
           </a:ln>
@@ -3475,10 +3457,8 @@
             <a:pPr algn="ctr"/>
             <a:r>
               <a:rPr sz="1800" b="0" i="0">
-                <a:solidFill>
-                  <a:srgbClr val="BBBBBB"/>
-                </a:solidFill>
-                <a:latin typeface="Calibri"/>
+                <a:solidFill>val="9AA7B6"/&gt;</a:solidFill>
+                <a:latin typeface="Poppins"/>
               </a:rPr>
               <a:t>Dr. BELACEL Madani</a:t>
             </a:r>
@@ -3510,10 +3490,8 @@
             <a:pPr algn="ctr"/>
             <a:r>
               <a:rPr sz="1400" b="0" i="1">
-                <a:solidFill>
-                  <a:srgbClr val="BBBBBB"/>
-                </a:solidFill>
-                <a:latin typeface="Calibri"/>
+                <a:solidFill>val="9AA7B6"/&gt;</a:solidFill>
+                <a:latin typeface="Poppins"/>
               </a:rPr>
               <a:t>Année universitaire 2026-2027 / Academic Year 2026-2027</a:t>
             </a:r>
@@ -3545,10 +3523,8 @@
             <a:pPr algn="ctr"/>
             <a:r>
               <a:rPr sz="1200" b="0" i="1">
-                <a:solidFill>
-                  <a:srgbClr val="BBBBBB"/>
-                </a:solidFill>
-                <a:latin typeface="Calibri"/>
+                <a:solidFill>val="9AA7B6"/&gt;</a:solidFill>
+                <a:latin typeface="Poppins"/>
               </a:rPr>
               <a:t>Université de Mostaganem - Département Mathématiques et Informatique</a:t>
             </a:r>
@@ -3579,6 +3555,47 @@
           </a:prstGeom>
         </p:spPr>
       </p:pic>
+      <p:sp>
+        <p:nvSpPr>
+          <p:cNvPr id="990001" name="Pied de page FLE"/>
+          <p:cNvSpPr>
+            <a:spLocks noGrp="1"/>
+          </p:cNvSpPr>
+          <p:nvPr/>
+        </p:nvSpPr>
+        <p:spPr>
+          <a:xfrm>
+            <a:off x="4343400" y="-329184"/>
+            <a:ext cx="4572000" cy="274320"/>
+          </a:xfrm>
+          <a:prstGeom prst="rect">
+            <a:avLst/>
+          </a:prstGeom>
+        </p:spPr>
+        <p:txBody>
+          <a:bodyPr anchor="b"/>
+          <a:lstStyle/>
+          <a:p>
+            <a:pPr algn="r">
+              <a:defRPr sz="900">
+                <a:solidFill>
+                  <a:srgbClr val="9AA7B6"/>
+                </a:solidFill>
+                <a:latin typeface="Poppins"/>
+              </a:defRPr>
+            </a:pPr>
+            <a:r>
+              <a:rPr lang="fr-FR" sz="900">
+                <a:solidFill>
+                  <a:srgbClr val="9AA7B6"/>
+                </a:solidFill>
+                <a:latin typeface="Poppins"/>
+              </a:rPr>
+              <a:t>Université de Mostaganem — Dr. Madani BELACEL</a:t>
+            </a:r>
+          </a:p>
+        </p:txBody>
+      </p:sp>
     </p:spTree>
   </p:cSld>
   <p:clrMapOvr>
@@ -3592,9 +3609,7 @@
   <p:cSld>
     <p:bg>
       <p:bgPr>
-        <a:solidFill>
-          <a:srgbClr val="0B3D2E"/>
-        </a:solidFill>
+        <a:solidFill>val="004A38"/&gt;</a:solidFill>
         <a:effectLst/>
       </p:bgPr>
     </p:bg>
@@ -3619,9 +3634,7 @@
           <a:prstGeom prst="rect">
             <a:avLst/>
           </a:prstGeom>
-          <a:solidFill>
-            <a:srgbClr val="146B4A"/>
-          </a:solidFill>
+          <a:solidFill>val="007A55"/&gt;</a:solidFill>
           <a:ln>
             <a:noFill/>
           </a:ln>
@@ -3663,9 +3676,7 @@
           <a:prstGeom prst="rect">
             <a:avLst/>
           </a:prstGeom>
-          <a:solidFill>
-            <a:srgbClr val="FFD700"/>
-          </a:solidFill>
+          <a:solidFill>val="F0B429"/&gt;</a:solidFill>
           <a:ln>
             <a:noFill/>
           </a:ln>
@@ -3707,9 +3718,7 @@
           <a:prstGeom prst="rect">
             <a:avLst/>
           </a:prstGeom>
-          <a:solidFill>
-            <a:srgbClr val="FFD700"/>
-          </a:solidFill>
+          <a:solidFill>val="F0B429"/&gt;</a:solidFill>
           <a:ln>
             <a:noFill/>
           </a:ln>
@@ -3751,9 +3760,7 @@
           <a:prstGeom prst="rect">
             <a:avLst/>
           </a:prstGeom>
-          <a:solidFill>
-            <a:srgbClr val="146B4A"/>
-          </a:solidFill>
+          <a:solidFill>val="007A55"/&gt;</a:solidFill>
           <a:ln>
             <a:noFill/>
           </a:ln>
@@ -3806,10 +3813,8 @@
             <a:pPr algn="l"/>
             <a:r>
               <a:rPr sz="2400" b="1" i="0">
-                <a:solidFill>
-                  <a:srgbClr val="FFD700"/>
-                </a:solidFill>
-                <a:latin typeface="Calibri"/>
+                <a:solidFill>val="F0B429"/&gt;</a:solidFill>
+                <a:latin typeface="Poppins"/>
               </a:rPr>
               <a:t>4 - Gestion des fichiers et dossiers</a:t>
             </a:r>
@@ -3830,9 +3835,7 @@
           <a:prstGeom prst="rect">
             <a:avLst/>
           </a:prstGeom>
-          <a:solidFill>
-            <a:srgbClr val="146B4A"/>
-          </a:solidFill>
+          <a:solidFill>val="007A55"/&gt;</a:solidFill>
           <a:ln>
             <a:noFill/>
           </a:ln>
@@ -3889,10 +3892,8 @@
             </a:pPr>
             <a:r>
               <a:rPr sz="1800">
-                <a:solidFill>
-                  <a:srgbClr val="FFFFFF"/>
-                </a:solidFill>
-                <a:latin typeface="Calibri"/>
+                <a:solidFill>val="FFFFFF"/&gt;</a:solidFill>
+                <a:latin typeface="Poppins"/>
               </a:rPr>
               <a:t>▪  Hiérarchie : lecteur &gt; dossier &gt; sous-dossier &gt; fichier.</a:t>
             </a:r>
@@ -3905,10 +3906,8 @@
             </a:pPr>
             <a:r>
               <a:rPr sz="1800">
-                <a:solidFill>
-                  <a:srgbClr val="FFFFFF"/>
-                </a:solidFill>
-                <a:latin typeface="Calibri"/>
+                <a:solidFill>val="FFFFFF"/&gt;</a:solidFill>
+                <a:latin typeface="Poppins"/>
               </a:rPr>
               <a:t>▪  Explorateur de fichiers : navigation et organisation.</a:t>
             </a:r>
@@ -3921,10 +3920,8 @@
             </a:pPr>
             <a:r>
               <a:rPr sz="1800">
-                <a:solidFill>
-                  <a:srgbClr val="FFFFFF"/>
-                </a:solidFill>
-                <a:latin typeface="Calibri"/>
+                <a:solidFill>val="FFFFFF"/&gt;</a:solidFill>
+                <a:latin typeface="Poppins"/>
               </a:rPr>
               <a:t>▪  Opérations : créer, copier, déplacer, renommer, supprimer.</a:t>
             </a:r>
@@ -3937,10 +3934,8 @@
             </a:pPr>
             <a:r>
               <a:rPr sz="1800">
-                <a:solidFill>
-                  <a:srgbClr val="FFFFFF"/>
-                </a:solidFill>
-                <a:latin typeface="Calibri"/>
+                <a:solidFill>val="FFFFFF"/&gt;</a:solidFill>
+                <a:latin typeface="Poppins"/>
               </a:rPr>
               <a:t>▪  Extensions : .txt, .docx, .xlsx, .pdf, .jpg, .exe.</a:t>
             </a:r>
@@ -3953,10 +3948,8 @@
             </a:pPr>
             <a:r>
               <a:rPr sz="1800">
-                <a:solidFill>
-                  <a:srgbClr val="FFFFFF"/>
-                </a:solidFill>
-                <a:latin typeface="Calibri"/>
+                <a:solidFill>val="FFFFFF"/&gt;</a:solidFill>
+                <a:latin typeface="Poppins"/>
               </a:rPr>
               <a:t>▪  Recherche et tri des fichiers.</a:t>
             </a:r>
@@ -3987,6 +3980,47 @@
           </a:prstGeom>
         </p:spPr>
       </p:pic>
+      <p:sp>
+        <p:nvSpPr>
+          <p:cNvPr id="990001" name="Pied de page FLE"/>
+          <p:cNvSpPr>
+            <a:spLocks noGrp="1"/>
+          </p:cNvSpPr>
+          <p:nvPr/>
+        </p:nvSpPr>
+        <p:spPr>
+          <a:xfrm>
+            <a:off x="4343400" y="-329184"/>
+            <a:ext cx="4572000" cy="274320"/>
+          </a:xfrm>
+          <a:prstGeom prst="rect">
+            <a:avLst/>
+          </a:prstGeom>
+        </p:spPr>
+        <p:txBody>
+          <a:bodyPr anchor="b"/>
+          <a:lstStyle/>
+          <a:p>
+            <a:pPr algn="r">
+              <a:defRPr sz="900">
+                <a:solidFill>
+                  <a:srgbClr val="9AA7B6"/>
+                </a:solidFill>
+                <a:latin typeface="Poppins"/>
+              </a:defRPr>
+            </a:pPr>
+            <a:r>
+              <a:rPr lang="fr-FR" sz="900">
+                <a:solidFill>
+                  <a:srgbClr val="9AA7B6"/>
+                </a:solidFill>
+                <a:latin typeface="Poppins"/>
+              </a:rPr>
+              <a:t>Université de Mostaganem — Dr. Madani BELACEL</a:t>
+            </a:r>
+          </a:p>
+        </p:txBody>
+      </p:sp>
     </p:spTree>
   </p:cSld>
   <p:clrMapOvr>
@@ -4000,9 +4034,7 @@
   <p:cSld>
     <p:bg>
       <p:bgPr>
-        <a:solidFill>
-          <a:srgbClr val="0B3D2E"/>
-        </a:solidFill>
+        <a:solidFill>val="004A38"/&gt;</a:solidFill>
         <a:effectLst/>
       </p:bgPr>
     </p:bg>
@@ -4027,9 +4059,7 @@
           <a:prstGeom prst="rect">
             <a:avLst/>
           </a:prstGeom>
-          <a:solidFill>
-            <a:srgbClr val="146B4A"/>
-          </a:solidFill>
+          <a:solidFill>val="007A55"/&gt;</a:solidFill>
           <a:ln>
             <a:noFill/>
           </a:ln>
@@ -4071,9 +4101,7 @@
           <a:prstGeom prst="rect">
             <a:avLst/>
           </a:prstGeom>
-          <a:solidFill>
-            <a:srgbClr val="FFD700"/>
-          </a:solidFill>
+          <a:solidFill>val="F0B429"/&gt;</a:solidFill>
           <a:ln>
             <a:noFill/>
           </a:ln>
@@ -4115,9 +4143,7 @@
           <a:prstGeom prst="rect">
             <a:avLst/>
           </a:prstGeom>
-          <a:solidFill>
-            <a:srgbClr val="FFD700"/>
-          </a:solidFill>
+          <a:solidFill>val="F0B429"/&gt;</a:solidFill>
           <a:ln>
             <a:noFill/>
           </a:ln>
@@ -4159,9 +4185,7 @@
           <a:prstGeom prst="rect">
             <a:avLst/>
           </a:prstGeom>
-          <a:solidFill>
-            <a:srgbClr val="146B4A"/>
-          </a:solidFill>
+          <a:solidFill>val="007A55"/&gt;</a:solidFill>
           <a:ln>
             <a:noFill/>
           </a:ln>
@@ -4203,9 +4227,7 @@
           <a:prstGeom prst="rect">
             <a:avLst/>
           </a:prstGeom>
-          <a:solidFill>
-            <a:srgbClr val="146B4A"/>
-          </a:solidFill>
+          <a:solidFill>val="007A55"/&gt;</a:solidFill>
           <a:ln>
             <a:noFill/>
           </a:ln>
@@ -4258,10 +4280,8 @@
             <a:pPr algn="ctr"/>
             <a:r>
               <a:rPr sz="2200" b="1" i="0">
-                <a:solidFill>
-                  <a:srgbClr val="BBBBBB"/>
-                </a:solidFill>
-                <a:latin typeface="Calibri"/>
+                <a:solidFill>val="9AA7B6"/&gt;</a:solidFill>
+                <a:latin typeface="Poppins"/>
               </a:rPr>
               <a:t>Section 5</a:t>
             </a:r>
@@ -4293,10 +4313,8 @@
             <a:pPr algn="ctr"/>
             <a:r>
               <a:rPr sz="2800" b="1" i="0">
-                <a:solidFill>
-                  <a:srgbClr val="FFD700"/>
-                </a:solidFill>
-                <a:latin typeface="Calibri"/>
+                <a:solidFill>val="F0B429"/&gt;</a:solidFill>
+                <a:latin typeface="Poppins"/>
               </a:rPr>
               <a:t>Paramètres et personnalisation</a:t>
             </a:r>
@@ -4327,6 +4345,47 @@
           </a:prstGeom>
         </p:spPr>
       </p:pic>
+      <p:sp>
+        <p:nvSpPr>
+          <p:cNvPr id="990001" name="Pied de page FLE"/>
+          <p:cNvSpPr>
+            <a:spLocks noGrp="1"/>
+          </p:cNvSpPr>
+          <p:nvPr/>
+        </p:nvSpPr>
+        <p:spPr>
+          <a:xfrm>
+            <a:off x="4343400" y="-329184"/>
+            <a:ext cx="4572000" cy="274320"/>
+          </a:xfrm>
+          <a:prstGeom prst="rect">
+            <a:avLst/>
+          </a:prstGeom>
+        </p:spPr>
+        <p:txBody>
+          <a:bodyPr anchor="b"/>
+          <a:lstStyle/>
+          <a:p>
+            <a:pPr algn="r">
+              <a:defRPr sz="900">
+                <a:solidFill>
+                  <a:srgbClr val="9AA7B6"/>
+                </a:solidFill>
+                <a:latin typeface="Poppins"/>
+              </a:defRPr>
+            </a:pPr>
+            <a:r>
+              <a:rPr lang="fr-FR" sz="900">
+                <a:solidFill>
+                  <a:srgbClr val="9AA7B6"/>
+                </a:solidFill>
+                <a:latin typeface="Poppins"/>
+              </a:rPr>
+              <a:t>Université de Mostaganem — Dr. Madani BELACEL</a:t>
+            </a:r>
+          </a:p>
+        </p:txBody>
+      </p:sp>
     </p:spTree>
   </p:cSld>
   <p:clrMapOvr>
@@ -4340,9 +4399,7 @@
   <p:cSld>
     <p:bg>
       <p:bgPr>
-        <a:solidFill>
-          <a:srgbClr val="0B3D2E"/>
-        </a:solidFill>
+        <a:solidFill>val="004A38"/&gt;</a:solidFill>
         <a:effectLst/>
       </p:bgPr>
     </p:bg>
@@ -4367,9 +4424,7 @@
           <a:prstGeom prst="rect">
             <a:avLst/>
           </a:prstGeom>
-          <a:solidFill>
-            <a:srgbClr val="146B4A"/>
-          </a:solidFill>
+          <a:solidFill>val="007A55"/&gt;</a:solidFill>
           <a:ln>
             <a:noFill/>
           </a:ln>
@@ -4411,9 +4466,7 @@
           <a:prstGeom prst="rect">
             <a:avLst/>
           </a:prstGeom>
-          <a:solidFill>
-            <a:srgbClr val="FFD700"/>
-          </a:solidFill>
+          <a:solidFill>val="F0B429"/&gt;</a:solidFill>
           <a:ln>
             <a:noFill/>
           </a:ln>
@@ -4455,9 +4508,7 @@
           <a:prstGeom prst="rect">
             <a:avLst/>
           </a:prstGeom>
-          <a:solidFill>
-            <a:srgbClr val="FFD700"/>
-          </a:solidFill>
+          <a:solidFill>val="F0B429"/&gt;</a:solidFill>
           <a:ln>
             <a:noFill/>
           </a:ln>
@@ -4499,9 +4550,7 @@
           <a:prstGeom prst="rect">
             <a:avLst/>
           </a:prstGeom>
-          <a:solidFill>
-            <a:srgbClr val="146B4A"/>
-          </a:solidFill>
+          <a:solidFill>val="007A55"/&gt;</a:solidFill>
           <a:ln>
             <a:noFill/>
           </a:ln>
@@ -4554,10 +4603,8 @@
             <a:pPr algn="l"/>
             <a:r>
               <a:rPr sz="2400" b="1" i="0">
-                <a:solidFill>
-                  <a:srgbClr val="FFD700"/>
-                </a:solidFill>
-                <a:latin typeface="Calibri"/>
+                <a:solidFill>val="F0B429"/&gt;</a:solidFill>
+                <a:latin typeface="Poppins"/>
               </a:rPr>
               <a:t>5 - Paramètres et personnalisation</a:t>
             </a:r>
@@ -4578,9 +4625,7 @@
           <a:prstGeom prst="rect">
             <a:avLst/>
           </a:prstGeom>
-          <a:solidFill>
-            <a:srgbClr val="146B4A"/>
-          </a:solidFill>
+          <a:solidFill>val="007A55"/&gt;</a:solidFill>
           <a:ln>
             <a:noFill/>
           </a:ln>
@@ -4637,10 +4682,8 @@
             </a:pPr>
             <a:r>
               <a:rPr sz="1800">
-                <a:solidFill>
-                  <a:srgbClr val="FFFFFF"/>
-                </a:solidFill>
-                <a:latin typeface="Calibri"/>
+                <a:solidFill>val="FFFFFF"/&gt;</a:solidFill>
+                <a:latin typeface="Poppins"/>
               </a:rPr>
               <a:t>▪  Panneau de configuration / Paramètres : réglages système.</a:t>
             </a:r>
@@ -4653,10 +4696,8 @@
             </a:pPr>
             <a:r>
               <a:rPr sz="1800">
-                <a:solidFill>
-                  <a:srgbClr val="FFFFFF"/>
-                </a:solidFill>
-                <a:latin typeface="Calibri"/>
+                <a:solidFill>val="FFFFFF"/&gt;</a:solidFill>
+                <a:latin typeface="Poppins"/>
               </a:rPr>
               <a:t>▪  Personnalisation : fond d'écran, thème, couleurs.</a:t>
             </a:r>
@@ -4669,10 +4710,8 @@
             </a:pPr>
             <a:r>
               <a:rPr sz="1800">
-                <a:solidFill>
-                  <a:srgbClr val="FFFFFF"/>
-                </a:solidFill>
-                <a:latin typeface="Calibri"/>
+                <a:solidFill>val="FFFFFF"/&gt;</a:solidFill>
+                <a:latin typeface="Poppins"/>
               </a:rPr>
               <a:t>▪  Comptes utilisateurs : administrateur vs utilisateur standard.</a:t>
             </a:r>
@@ -4685,10 +4724,8 @@
             </a:pPr>
             <a:r>
               <a:rPr sz="1800">
-                <a:solidFill>
-                  <a:srgbClr val="FFFFFF"/>
-                </a:solidFill>
-                <a:latin typeface="Calibri"/>
+                <a:solidFill>val="FFFFFF"/&gt;</a:solidFill>
+                <a:latin typeface="Poppins"/>
               </a:rPr>
               <a:t>▪  Date/heure, langue, clavier, écran et son.</a:t>
             </a:r>
@@ -4719,6 +4756,47 @@
           </a:prstGeom>
         </p:spPr>
       </p:pic>
+      <p:sp>
+        <p:nvSpPr>
+          <p:cNvPr id="990001" name="Pied de page FLE"/>
+          <p:cNvSpPr>
+            <a:spLocks noGrp="1"/>
+          </p:cNvSpPr>
+          <p:nvPr/>
+        </p:nvSpPr>
+        <p:spPr>
+          <a:xfrm>
+            <a:off x="4343400" y="-329184"/>
+            <a:ext cx="4572000" cy="274320"/>
+          </a:xfrm>
+          <a:prstGeom prst="rect">
+            <a:avLst/>
+          </a:prstGeom>
+        </p:spPr>
+        <p:txBody>
+          <a:bodyPr anchor="b"/>
+          <a:lstStyle/>
+          <a:p>
+            <a:pPr algn="r">
+              <a:defRPr sz="900">
+                <a:solidFill>
+                  <a:srgbClr val="9AA7B6"/>
+                </a:solidFill>
+                <a:latin typeface="Poppins"/>
+              </a:defRPr>
+            </a:pPr>
+            <a:r>
+              <a:rPr lang="fr-FR" sz="900">
+                <a:solidFill>
+                  <a:srgbClr val="9AA7B6"/>
+                </a:solidFill>
+                <a:latin typeface="Poppins"/>
+              </a:rPr>
+              <a:t>Université de Mostaganem — Dr. Madani BELACEL</a:t>
+            </a:r>
+          </a:p>
+        </p:txBody>
+      </p:sp>
     </p:spTree>
   </p:cSld>
   <p:clrMapOvr>
@@ -4732,9 +4810,7 @@
   <p:cSld>
     <p:bg>
       <p:bgPr>
-        <a:solidFill>
-          <a:srgbClr val="0B3D2E"/>
-        </a:solidFill>
+        <a:solidFill>val="004A38"/&gt;</a:solidFill>
         <a:effectLst/>
       </p:bgPr>
     </p:bg>
@@ -4759,9 +4835,7 @@
           <a:prstGeom prst="rect">
             <a:avLst/>
           </a:prstGeom>
-          <a:solidFill>
-            <a:srgbClr val="146B4A"/>
-          </a:solidFill>
+          <a:solidFill>val="007A55"/&gt;</a:solidFill>
           <a:ln>
             <a:noFill/>
           </a:ln>
@@ -4803,9 +4877,7 @@
           <a:prstGeom prst="rect">
             <a:avLst/>
           </a:prstGeom>
-          <a:solidFill>
-            <a:srgbClr val="FFD700"/>
-          </a:solidFill>
+          <a:solidFill>val="F0B429"/&gt;</a:solidFill>
           <a:ln>
             <a:noFill/>
           </a:ln>
@@ -4847,9 +4919,7 @@
           <a:prstGeom prst="rect">
             <a:avLst/>
           </a:prstGeom>
-          <a:solidFill>
-            <a:srgbClr val="FFD700"/>
-          </a:solidFill>
+          <a:solidFill>val="F0B429"/&gt;</a:solidFill>
           <a:ln>
             <a:noFill/>
           </a:ln>
@@ -4891,9 +4961,7 @@
           <a:prstGeom prst="rect">
             <a:avLst/>
           </a:prstGeom>
-          <a:solidFill>
-            <a:srgbClr val="146B4A"/>
-          </a:solidFill>
+          <a:solidFill>val="007A55"/&gt;</a:solidFill>
           <a:ln>
             <a:noFill/>
           </a:ln>
@@ -4935,9 +5003,7 @@
           <a:prstGeom prst="rect">
             <a:avLst/>
           </a:prstGeom>
-          <a:solidFill>
-            <a:srgbClr val="146B4A"/>
-          </a:solidFill>
+          <a:solidFill>val="007A55"/&gt;</a:solidFill>
           <a:ln>
             <a:noFill/>
           </a:ln>
@@ -4990,10 +5056,8 @@
             <a:pPr algn="ctr"/>
             <a:r>
               <a:rPr sz="2200" b="1" i="0">
-                <a:solidFill>
-                  <a:srgbClr val="BBBBBB"/>
-                </a:solidFill>
-                <a:latin typeface="Calibri"/>
+                <a:solidFill>val="9AA7B6"/&gt;</a:solidFill>
+                <a:latin typeface="Poppins"/>
               </a:rPr>
               <a:t>Section 6</a:t>
             </a:r>
@@ -5025,10 +5089,8 @@
             <a:pPr algn="ctr"/>
             <a:r>
               <a:rPr sz="2800" b="1" i="0">
-                <a:solidFill>
-                  <a:srgbClr val="FFD700"/>
-                </a:solidFill>
-                <a:latin typeface="Calibri"/>
+                <a:solidFill>val="F0B429"/&gt;</a:solidFill>
+                <a:latin typeface="Poppins"/>
               </a:rPr>
               <a:t>Raccourcis clavier utiles</a:t>
             </a:r>
@@ -5059,6 +5121,47 @@
           </a:prstGeom>
         </p:spPr>
       </p:pic>
+      <p:sp>
+        <p:nvSpPr>
+          <p:cNvPr id="990001" name="Pied de page FLE"/>
+          <p:cNvSpPr>
+            <a:spLocks noGrp="1"/>
+          </p:cNvSpPr>
+          <p:nvPr/>
+        </p:nvSpPr>
+        <p:spPr>
+          <a:xfrm>
+            <a:off x="4343400" y="-329184"/>
+            <a:ext cx="4572000" cy="274320"/>
+          </a:xfrm>
+          <a:prstGeom prst="rect">
+            <a:avLst/>
+          </a:prstGeom>
+        </p:spPr>
+        <p:txBody>
+          <a:bodyPr anchor="b"/>
+          <a:lstStyle/>
+          <a:p>
+            <a:pPr algn="r">
+              <a:defRPr sz="900">
+                <a:solidFill>
+                  <a:srgbClr val="9AA7B6"/>
+                </a:solidFill>
+                <a:latin typeface="Poppins"/>
+              </a:defRPr>
+            </a:pPr>
+            <a:r>
+              <a:rPr lang="fr-FR" sz="900">
+                <a:solidFill>
+                  <a:srgbClr val="9AA7B6"/>
+                </a:solidFill>
+                <a:latin typeface="Poppins"/>
+              </a:rPr>
+              <a:t>Université de Mostaganem — Dr. Madani BELACEL</a:t>
+            </a:r>
+          </a:p>
+        </p:txBody>
+      </p:sp>
     </p:spTree>
   </p:cSld>
   <p:clrMapOvr>
@@ -5072,9 +5175,7 @@
   <p:cSld>
     <p:bg>
       <p:bgPr>
-        <a:solidFill>
-          <a:srgbClr val="0B3D2E"/>
-        </a:solidFill>
+        <a:solidFill>val="004A38"/&gt;</a:solidFill>
         <a:effectLst/>
       </p:bgPr>
     </p:bg>
@@ -5099,9 +5200,7 @@
           <a:prstGeom prst="rect">
             <a:avLst/>
           </a:prstGeom>
-          <a:solidFill>
-            <a:srgbClr val="146B4A"/>
-          </a:solidFill>
+          <a:solidFill>val="007A55"/&gt;</a:solidFill>
           <a:ln>
             <a:noFill/>
           </a:ln>
@@ -5143,9 +5242,7 @@
           <a:prstGeom prst="rect">
             <a:avLst/>
           </a:prstGeom>
-          <a:solidFill>
-            <a:srgbClr val="FFD700"/>
-          </a:solidFill>
+          <a:solidFill>val="F0B429"/&gt;</a:solidFill>
           <a:ln>
             <a:noFill/>
           </a:ln>
@@ -5187,9 +5284,7 @@
           <a:prstGeom prst="rect">
             <a:avLst/>
           </a:prstGeom>
-          <a:solidFill>
-            <a:srgbClr val="FFD700"/>
-          </a:solidFill>
+          <a:solidFill>val="F0B429"/&gt;</a:solidFill>
           <a:ln>
             <a:noFill/>
           </a:ln>
@@ -5231,9 +5326,7 @@
           <a:prstGeom prst="rect">
             <a:avLst/>
           </a:prstGeom>
-          <a:solidFill>
-            <a:srgbClr val="146B4A"/>
-          </a:solidFill>
+          <a:solidFill>val="007A55"/&gt;</a:solidFill>
           <a:ln>
             <a:noFill/>
           </a:ln>
@@ -5286,10 +5379,8 @@
             <a:pPr algn="l"/>
             <a:r>
               <a:rPr sz="2400" b="1" i="0">
-                <a:solidFill>
-                  <a:srgbClr val="FFD700"/>
-                </a:solidFill>
-                <a:latin typeface="Calibri"/>
+                <a:solidFill>val="F0B429"/&gt;</a:solidFill>
+                <a:latin typeface="Poppins"/>
               </a:rPr>
               <a:t>6 - Raccourcis clavier utiles</a:t>
             </a:r>
@@ -5310,9 +5401,7 @@
           <a:prstGeom prst="rect">
             <a:avLst/>
           </a:prstGeom>
-          <a:solidFill>
-            <a:srgbClr val="146B4A"/>
-          </a:solidFill>
+          <a:solidFill>val="007A55"/&gt;</a:solidFill>
           <a:ln>
             <a:noFill/>
           </a:ln>
@@ -5369,10 +5458,8 @@
             </a:pPr>
             <a:r>
               <a:rPr sz="1800">
-                <a:solidFill>
-                  <a:srgbClr val="FFFFFF"/>
-                </a:solidFill>
-                <a:latin typeface="Calibri"/>
+                <a:solidFill>val="FFFFFF"/&gt;</a:solidFill>
+                <a:latin typeface="Poppins"/>
               </a:rPr>
               <a:t>▪  Ctrl+C / Ctrl+X / Ctrl+V : copier / couvrir / coller.</a:t>
             </a:r>
@@ -5385,10 +5472,8 @@
             </a:pPr>
             <a:r>
               <a:rPr sz="1800">
-                <a:solidFill>
-                  <a:srgbClr val="FFFFFF"/>
-                </a:solidFill>
-                <a:latin typeface="Calibri"/>
+                <a:solidFill>val="FFFFFF"/&gt;</a:solidFill>
+                <a:latin typeface="Poppins"/>
               </a:rPr>
               <a:t>▪  Ctrl+Z : annuler ; Ctrl+S : enregistrer.</a:t>
             </a:r>
@@ -5401,10 +5486,8 @@
             </a:pPr>
             <a:r>
               <a:rPr sz="1800">
-                <a:solidFill>
-                  <a:srgbClr val="FFFFFF"/>
-                </a:solidFill>
-                <a:latin typeface="Calibri"/>
+                <a:solidFill>val="FFFFFF"/&gt;</a:solidFill>
+                <a:latin typeface="Poppins"/>
               </a:rPr>
               <a:t>▪  Alt+Tab : basculer entre les fenêtres.</a:t>
             </a:r>
@@ -5417,10 +5500,8 @@
             </a:pPr>
             <a:r>
               <a:rPr sz="1800">
-                <a:solidFill>
-                  <a:srgbClr val="FFFFFF"/>
-                </a:solidFill>
-                <a:latin typeface="Calibri"/>
+                <a:solidFill>val="FFFFFF"/&gt;</a:solidFill>
+                <a:latin typeface="Poppins"/>
               </a:rPr>
               <a:t>▪  Windows+D : afficher le bureau ; Windows+E : explorateur.</a:t>
             </a:r>
@@ -5433,10 +5514,8 @@
             </a:pPr>
             <a:r>
               <a:rPr sz="1800">
-                <a:solidFill>
-                  <a:srgbClr val="FFFFFF"/>
-                </a:solidFill>
-                <a:latin typeface="Calibri"/>
+                <a:solidFill>val="FFFFFF"/&gt;</a:solidFill>
+                <a:latin typeface="Poppins"/>
               </a:rPr>
               <a:t>▪  Ctrl+Alt+Suppr : gestionnaire des tâches.</a:t>
             </a:r>
@@ -5467,6 +5546,47 @@
           </a:prstGeom>
         </p:spPr>
       </p:pic>
+      <p:sp>
+        <p:nvSpPr>
+          <p:cNvPr id="990001" name="Pied de page FLE"/>
+          <p:cNvSpPr>
+            <a:spLocks noGrp="1"/>
+          </p:cNvSpPr>
+          <p:nvPr/>
+        </p:nvSpPr>
+        <p:spPr>
+          <a:xfrm>
+            <a:off x="4343400" y="-329184"/>
+            <a:ext cx="4572000" cy="274320"/>
+          </a:xfrm>
+          <a:prstGeom prst="rect">
+            <a:avLst/>
+          </a:prstGeom>
+        </p:spPr>
+        <p:txBody>
+          <a:bodyPr anchor="b"/>
+          <a:lstStyle/>
+          <a:p>
+            <a:pPr algn="r">
+              <a:defRPr sz="900">
+                <a:solidFill>
+                  <a:srgbClr val="9AA7B6"/>
+                </a:solidFill>
+                <a:latin typeface="Poppins"/>
+              </a:defRPr>
+            </a:pPr>
+            <a:r>
+              <a:rPr lang="fr-FR" sz="900">
+                <a:solidFill>
+                  <a:srgbClr val="9AA7B6"/>
+                </a:solidFill>
+                <a:latin typeface="Poppins"/>
+              </a:rPr>
+              <a:t>Université de Mostaganem — Dr. Madani BELACEL</a:t>
+            </a:r>
+          </a:p>
+        </p:txBody>
+      </p:sp>
     </p:spTree>
   </p:cSld>
   <p:clrMapOvr>
@@ -5480,9 +5600,7 @@
   <p:cSld>
     <p:bg>
       <p:bgPr>
-        <a:solidFill>
-          <a:srgbClr val="0B3D2E"/>
-        </a:solidFill>
+        <a:solidFill>val="004A38"/&gt;</a:solidFill>
         <a:effectLst/>
       </p:bgPr>
     </p:bg>
@@ -5507,9 +5625,7 @@
           <a:prstGeom prst="rect">
             <a:avLst/>
           </a:prstGeom>
-          <a:solidFill>
-            <a:srgbClr val="146B4A"/>
-          </a:solidFill>
+          <a:solidFill>val="007A55"/&gt;</a:solidFill>
           <a:ln>
             <a:noFill/>
           </a:ln>
@@ -5551,9 +5667,7 @@
           <a:prstGeom prst="rect">
             <a:avLst/>
           </a:prstGeom>
-          <a:solidFill>
-            <a:srgbClr val="FFD700"/>
-          </a:solidFill>
+          <a:solidFill>val="F0B429"/&gt;</a:solidFill>
           <a:ln>
             <a:noFill/>
           </a:ln>
@@ -5595,9 +5709,7 @@
           <a:prstGeom prst="rect">
             <a:avLst/>
           </a:prstGeom>
-          <a:solidFill>
-            <a:srgbClr val="FFD700"/>
-          </a:solidFill>
+          <a:solidFill>val="F0B429"/&gt;</a:solidFill>
           <a:ln>
             <a:noFill/>
           </a:ln>
@@ -5639,9 +5751,7 @@
           <a:prstGeom prst="rect">
             <a:avLst/>
           </a:prstGeom>
-          <a:solidFill>
-            <a:srgbClr val="146B4A"/>
-          </a:solidFill>
+          <a:solidFill>val="007A55"/&gt;</a:solidFill>
           <a:ln>
             <a:noFill/>
           </a:ln>
@@ -5683,9 +5793,7 @@
           <a:prstGeom prst="rect">
             <a:avLst/>
           </a:prstGeom>
-          <a:solidFill>
-            <a:srgbClr val="146B4A"/>
-          </a:solidFill>
+          <a:solidFill>val="007A55"/&gt;</a:solidFill>
           <a:ln>
             <a:noFill/>
           </a:ln>
@@ -5738,10 +5846,8 @@
             <a:pPr algn="ctr"/>
             <a:r>
               <a:rPr sz="2200" b="1" i="0">
-                <a:solidFill>
-                  <a:srgbClr val="BBBBBB"/>
-                </a:solidFill>
-                <a:latin typeface="Calibri"/>
+                <a:solidFill>val="9AA7B6"/&gt;</a:solidFill>
+                <a:latin typeface="Poppins"/>
               </a:rPr>
               <a:t>Section 7</a:t>
             </a:r>
@@ -5773,10 +5879,8 @@
             <a:pPr algn="ctr"/>
             <a:r>
               <a:rPr sz="2800" b="1" i="0">
-                <a:solidFill>
-                  <a:srgbClr val="FFD700"/>
-                </a:solidFill>
-                <a:latin typeface="Calibri"/>
+                <a:solidFill>val="F0B429"/&gt;</a:solidFill>
+                <a:latin typeface="Poppins"/>
               </a:rPr>
               <a:t>Maintenance et sécurité</a:t>
             </a:r>
@@ -5807,6 +5911,47 @@
           </a:prstGeom>
         </p:spPr>
       </p:pic>
+      <p:sp>
+        <p:nvSpPr>
+          <p:cNvPr id="990001" name="Pied de page FLE"/>
+          <p:cNvSpPr>
+            <a:spLocks noGrp="1"/>
+          </p:cNvSpPr>
+          <p:nvPr/>
+        </p:nvSpPr>
+        <p:spPr>
+          <a:xfrm>
+            <a:off x="4343400" y="-329184"/>
+            <a:ext cx="4572000" cy="274320"/>
+          </a:xfrm>
+          <a:prstGeom prst="rect">
+            <a:avLst/>
+          </a:prstGeom>
+        </p:spPr>
+        <p:txBody>
+          <a:bodyPr anchor="b"/>
+          <a:lstStyle/>
+          <a:p>
+            <a:pPr algn="r">
+              <a:defRPr sz="900">
+                <a:solidFill>
+                  <a:srgbClr val="9AA7B6"/>
+                </a:solidFill>
+                <a:latin typeface="Poppins"/>
+              </a:defRPr>
+            </a:pPr>
+            <a:r>
+              <a:rPr lang="fr-FR" sz="900">
+                <a:solidFill>
+                  <a:srgbClr val="9AA7B6"/>
+                </a:solidFill>
+                <a:latin typeface="Poppins"/>
+              </a:rPr>
+              <a:t>Université de Mostaganem — Dr. Madani BELACEL</a:t>
+            </a:r>
+          </a:p>
+        </p:txBody>
+      </p:sp>
     </p:spTree>
   </p:cSld>
   <p:clrMapOvr>
@@ -5820,9 +5965,7 @@
   <p:cSld>
     <p:bg>
       <p:bgPr>
-        <a:solidFill>
-          <a:srgbClr val="0B3D2E"/>
-        </a:solidFill>
+        <a:solidFill>val="004A38"/&gt;</a:solidFill>
         <a:effectLst/>
       </p:bgPr>
     </p:bg>
@@ -5847,9 +5990,7 @@
           <a:prstGeom prst="rect">
             <a:avLst/>
           </a:prstGeom>
-          <a:solidFill>
-            <a:srgbClr val="146B4A"/>
-          </a:solidFill>
+          <a:solidFill>val="007A55"/&gt;</a:solidFill>
           <a:ln>
             <a:noFill/>
           </a:ln>
@@ -5891,9 +6032,7 @@
           <a:prstGeom prst="rect">
             <a:avLst/>
           </a:prstGeom>
-          <a:solidFill>
-            <a:srgbClr val="FFD700"/>
-          </a:solidFill>
+          <a:solidFill>val="F0B429"/&gt;</a:solidFill>
           <a:ln>
             <a:noFill/>
           </a:ln>
@@ -5935,9 +6074,7 @@
           <a:prstGeom prst="rect">
             <a:avLst/>
           </a:prstGeom>
-          <a:solidFill>
-            <a:srgbClr val="FFD700"/>
-          </a:solidFill>
+          <a:solidFill>val="F0B429"/&gt;</a:solidFill>
           <a:ln>
             <a:noFill/>
           </a:ln>
@@ -5979,9 +6116,7 @@
           <a:prstGeom prst="rect">
             <a:avLst/>
           </a:prstGeom>
-          <a:solidFill>
-            <a:srgbClr val="146B4A"/>
-          </a:solidFill>
+          <a:solidFill>val="007A55"/&gt;</a:solidFill>
           <a:ln>
             <a:noFill/>
           </a:ln>
@@ -6034,10 +6169,8 @@
             <a:pPr algn="l"/>
             <a:r>
               <a:rPr sz="2400" b="1" i="0">
-                <a:solidFill>
-                  <a:srgbClr val="FFD700"/>
-                </a:solidFill>
-                <a:latin typeface="Calibri"/>
+                <a:solidFill>val="F0B429"/&gt;</a:solidFill>
+                <a:latin typeface="Poppins"/>
               </a:rPr>
               <a:t>7 - Maintenance et sécurité</a:t>
             </a:r>
@@ -6058,9 +6191,7 @@
           <a:prstGeom prst="rect">
             <a:avLst/>
           </a:prstGeom>
-          <a:solidFill>
-            <a:srgbClr val="146B4A"/>
-          </a:solidFill>
+          <a:solidFill>val="007A55"/&gt;</a:solidFill>
           <a:ln>
             <a:noFill/>
           </a:ln>
@@ -6117,10 +6248,8 @@
             </a:pPr>
             <a:r>
               <a:rPr sz="1800">
-                <a:solidFill>
-                  <a:srgbClr val="FFFFFF"/>
-                </a:solidFill>
-                <a:latin typeface="Calibri"/>
+                <a:solidFill>val="FFFFFF"/&gt;</a:solidFill>
+                <a:latin typeface="Poppins"/>
               </a:rPr>
               <a:t>▪  Mises à jour régulières de Windows Update.</a:t>
             </a:r>
@@ -6133,10 +6262,8 @@
             </a:pPr>
             <a:r>
               <a:rPr sz="1800">
-                <a:solidFill>
-                  <a:srgbClr val="FFFFFF"/>
-                </a:solidFill>
-                <a:latin typeface="Calibri"/>
+                <a:solidFill>val="FFFFFF"/&gt;</a:solidFill>
+                <a:latin typeface="Poppins"/>
               </a:rPr>
               <a:t>▪  Antivirus : protection contre malwares et virus.</a:t>
             </a:r>
@@ -6149,10 +6276,8 @@
             </a:pPr>
             <a:r>
               <a:rPr sz="1800">
-                <a:solidFill>
-                  <a:srgbClr val="FFFFFF"/>
-                </a:solidFill>
-                <a:latin typeface="Calibri"/>
+                <a:solidFill>val="FFFFFF"/&gt;</a:solidFill>
+                <a:latin typeface="Poppins"/>
               </a:rPr>
               <a:t>▪  Nettoyage du disque et défragmentation.</a:t>
             </a:r>
@@ -6165,10 +6290,8 @@
             </a:pPr>
             <a:r>
               <a:rPr sz="1800">
-                <a:solidFill>
-                  <a:srgbClr val="FFFFFF"/>
-                </a:solidFill>
-                <a:latin typeface="Calibri"/>
+                <a:solidFill>val="FFFFFF"/&gt;</a:solidFill>
+                <a:latin typeface="Poppins"/>
               </a:rPr>
               <a:t>▪  Sauvegarde des données importantes.</a:t>
             </a:r>
@@ -6181,10 +6304,8 @@
             </a:pPr>
             <a:r>
               <a:rPr sz="1800">
-                <a:solidFill>
-                  <a:srgbClr val="FFFFFF"/>
-                </a:solidFill>
-                <a:latin typeface="Calibri"/>
+                <a:solidFill>val="FFFFFF"/&gt;</a:solidFill>
+                <a:latin typeface="Poppins"/>
               </a:rPr>
               <a:t>▪  Gestionnaire des tâches : surveiller les processus.</a:t>
             </a:r>
@@ -6215,6 +6336,47 @@
           </a:prstGeom>
         </p:spPr>
       </p:pic>
+      <p:sp>
+        <p:nvSpPr>
+          <p:cNvPr id="990001" name="Pied de page FLE"/>
+          <p:cNvSpPr>
+            <a:spLocks noGrp="1"/>
+          </p:cNvSpPr>
+          <p:nvPr/>
+        </p:nvSpPr>
+        <p:spPr>
+          <a:xfrm>
+            <a:off x="4343400" y="-329184"/>
+            <a:ext cx="4572000" cy="274320"/>
+          </a:xfrm>
+          <a:prstGeom prst="rect">
+            <a:avLst/>
+          </a:prstGeom>
+        </p:spPr>
+        <p:txBody>
+          <a:bodyPr anchor="b"/>
+          <a:lstStyle/>
+          <a:p>
+            <a:pPr algn="r">
+              <a:defRPr sz="900">
+                <a:solidFill>
+                  <a:srgbClr val="9AA7B6"/>
+                </a:solidFill>
+                <a:latin typeface="Poppins"/>
+              </a:defRPr>
+            </a:pPr>
+            <a:r>
+              <a:rPr lang="fr-FR" sz="900">
+                <a:solidFill>
+                  <a:srgbClr val="9AA7B6"/>
+                </a:solidFill>
+                <a:latin typeface="Poppins"/>
+              </a:rPr>
+              <a:t>Université de Mostaganem — Dr. Madani BELACEL</a:t>
+            </a:r>
+          </a:p>
+        </p:txBody>
+      </p:sp>
     </p:spTree>
   </p:cSld>
   <p:clrMapOvr>
@@ -6228,9 +6390,7 @@
   <p:cSld>
     <p:bg>
       <p:bgPr>
-        <a:solidFill>
-          <a:srgbClr val="FF8C00"/>
-        </a:solidFill>
+        <a:solidFill>val="F0B429"/&gt;</a:solidFill>
         <a:effectLst/>
       </p:bgPr>
     </p:bg>
@@ -6255,9 +6415,7 @@
           <a:prstGeom prst="rect">
             <a:avLst/>
           </a:prstGeom>
-          <a:solidFill>
-            <a:srgbClr val="146B4A"/>
-          </a:solidFill>
+          <a:solidFill>val="007A55"/&gt;</a:solidFill>
           <a:ln>
             <a:noFill/>
           </a:ln>
@@ -6299,9 +6457,7 @@
           <a:prstGeom prst="rect">
             <a:avLst/>
           </a:prstGeom>
-          <a:solidFill>
-            <a:srgbClr val="FFD700"/>
-          </a:solidFill>
+          <a:solidFill>val="F0B429"/&gt;</a:solidFill>
           <a:ln>
             <a:noFill/>
           </a:ln>
@@ -6343,9 +6499,7 @@
           <a:prstGeom prst="rect">
             <a:avLst/>
           </a:prstGeom>
-          <a:solidFill>
-            <a:srgbClr val="FFD700"/>
-          </a:solidFill>
+          <a:solidFill>val="F0B429"/&gt;</a:solidFill>
           <a:ln>
             <a:noFill/>
           </a:ln>
@@ -6387,9 +6541,7 @@
           <a:prstGeom prst="rect">
             <a:avLst/>
           </a:prstGeom>
-          <a:solidFill>
-            <a:srgbClr val="146B4A"/>
-          </a:solidFill>
+          <a:solidFill>val="007A55"/&gt;</a:solidFill>
           <a:ln>
             <a:noFill/>
           </a:ln>
@@ -6442,10 +6594,8 @@
             <a:pPr algn="ctr"/>
             <a:r>
               <a:rPr sz="3000" b="1" i="0">
-                <a:solidFill>
-                  <a:srgbClr val="0B3D2E"/>
-                </a:solidFill>
-                <a:latin typeface="Calibri"/>
+                <a:solidFill>val="004A38"/&gt;</a:solidFill>
+                <a:latin typeface="Poppins"/>
               </a:rPr>
               <a:t>Intérêt pratique</a:t>
             </a:r>
@@ -6481,10 +6631,8 @@
             </a:pPr>
             <a:r>
               <a:rPr sz="1700">
-                <a:solidFill>
-                  <a:srgbClr val="0B3D2E"/>
-                </a:solidFill>
-                <a:latin typeface="Calibri"/>
+                <a:solidFill>val="004A38"/&gt;</a:solidFill>
+                <a:latin typeface="Poppins"/>
               </a:rPr>
               <a:t>▪  Organiser efficacement ses documents de cours dans des dossiers.</a:t>
             </a:r>
@@ -6497,10 +6645,8 @@
             </a:pPr>
             <a:r>
               <a:rPr sz="1700">
-                <a:solidFill>
-                  <a:srgbClr val="0B3D2E"/>
-                </a:solidFill>
-                <a:latin typeface="Calibri"/>
+                <a:solidFill>val="004A38"/&gt;</a:solidFill>
+                <a:latin typeface="Poppins"/>
               </a:rPr>
               <a:t>▪  Utiliser les raccourcis pour travailler plus vite.</a:t>
             </a:r>
@@ -6513,10 +6659,8 @@
             </a:pPr>
             <a:r>
               <a:rPr sz="1700">
-                <a:solidFill>
-                  <a:srgbClr val="0B3D2E"/>
-                </a:solidFill>
-                <a:latin typeface="Calibri"/>
+                <a:solidFill>val="004A38"/&gt;</a:solidFill>
+                <a:latin typeface="Poppins"/>
               </a:rPr>
               <a:t>▪  Résoudre un PC bloqué via le gestionnaire des tâches.</a:t>
             </a:r>
@@ -6529,10 +6673,8 @@
             </a:pPr>
             <a:r>
               <a:rPr sz="1700">
-                <a:solidFill>
-                  <a:srgbClr val="0B3D2E"/>
-                </a:solidFill>
-                <a:latin typeface="Calibri"/>
+                <a:solidFill>val="004A38"/&gt;</a:solidFill>
+                <a:latin typeface="Poppins"/>
               </a:rPr>
               <a:t>▪  Sécuriser ses données : mot de passe, sauvegardes, antivirus.</a:t>
             </a:r>
@@ -6563,6 +6705,47 @@
           </a:prstGeom>
         </p:spPr>
       </p:pic>
+      <p:sp>
+        <p:nvSpPr>
+          <p:cNvPr id="990001" name="Pied de page FLE"/>
+          <p:cNvSpPr>
+            <a:spLocks noGrp="1"/>
+          </p:cNvSpPr>
+          <p:nvPr/>
+        </p:nvSpPr>
+        <p:spPr>
+          <a:xfrm>
+            <a:off x="4343400" y="-329184"/>
+            <a:ext cx="4572000" cy="274320"/>
+          </a:xfrm>
+          <a:prstGeom prst="rect">
+            <a:avLst/>
+          </a:prstGeom>
+        </p:spPr>
+        <p:txBody>
+          <a:bodyPr anchor="b"/>
+          <a:lstStyle/>
+          <a:p>
+            <a:pPr algn="r">
+              <a:defRPr sz="900">
+                <a:solidFill>
+                  <a:srgbClr val="9AA7B6"/>
+                </a:solidFill>
+                <a:latin typeface="Poppins"/>
+              </a:defRPr>
+            </a:pPr>
+            <a:r>
+              <a:rPr lang="fr-FR" sz="900">
+                <a:solidFill>
+                  <a:srgbClr val="9AA7B6"/>
+                </a:solidFill>
+                <a:latin typeface="Poppins"/>
+              </a:rPr>
+              <a:t>Université de Mostaganem — Dr. Madani BELACEL</a:t>
+            </a:r>
+          </a:p>
+        </p:txBody>
+      </p:sp>
     </p:spTree>
   </p:cSld>
   <p:clrMapOvr>
@@ -6576,9 +6759,7 @@
   <p:cSld>
     <p:bg>
       <p:bgPr>
-        <a:solidFill>
-          <a:srgbClr val="0B3D2E"/>
-        </a:solidFill>
+        <a:solidFill>val="004A38"/&gt;</a:solidFill>
         <a:effectLst/>
       </p:bgPr>
     </p:bg>
@@ -6603,9 +6784,7 @@
           <a:prstGeom prst="rect">
             <a:avLst/>
           </a:prstGeom>
-          <a:solidFill>
-            <a:srgbClr val="146B4A"/>
-          </a:solidFill>
+          <a:solidFill>val="007A55"/&gt;</a:solidFill>
           <a:ln>
             <a:noFill/>
           </a:ln>
@@ -6647,9 +6826,7 @@
           <a:prstGeom prst="rect">
             <a:avLst/>
           </a:prstGeom>
-          <a:solidFill>
-            <a:srgbClr val="FFD700"/>
-          </a:solidFill>
+          <a:solidFill>val="F0B429"/&gt;</a:solidFill>
           <a:ln>
             <a:noFill/>
           </a:ln>
@@ -6691,9 +6868,7 @@
           <a:prstGeom prst="rect">
             <a:avLst/>
           </a:prstGeom>
-          <a:solidFill>
-            <a:srgbClr val="FFD700"/>
-          </a:solidFill>
+          <a:solidFill>val="F0B429"/&gt;</a:solidFill>
           <a:ln>
             <a:noFill/>
           </a:ln>
@@ -6735,9 +6910,7 @@
           <a:prstGeom prst="rect">
             <a:avLst/>
           </a:prstGeom>
-          <a:solidFill>
-            <a:srgbClr val="146B4A"/>
-          </a:solidFill>
+          <a:solidFill>val="007A55"/&gt;</a:solidFill>
           <a:ln>
             <a:noFill/>
           </a:ln>
@@ -6790,10 +6963,8 @@
             <a:pPr algn="l"/>
             <a:r>
               <a:rPr sz="2600" b="1" i="0">
-                <a:solidFill>
-                  <a:srgbClr val="FFD700"/>
-                </a:solidFill>
-                <a:latin typeface="Calibri"/>
+                <a:solidFill>val="F0B429"/&gt;</a:solidFill>
+                <a:latin typeface="Poppins"/>
               </a:rPr>
               <a:t>Auto-évaluation (QCM)</a:t>
             </a:r>
@@ -6814,9 +6985,7 @@
           <a:prstGeom prst="rect">
             <a:avLst/>
           </a:prstGeom>
-          <a:solidFill>
-            <a:srgbClr val="146B4A"/>
-          </a:solidFill>
+          <a:solidFill>val="007A55"/&gt;</a:solidFill>
           <a:ln>
             <a:noFill/>
           </a:ln>
@@ -6873,10 +7042,8 @@
             </a:pPr>
             <a:r>
               <a:rPr sz="1500" b="1">
-                <a:solidFill>
-                  <a:srgbClr val="FFFFFF"/>
-                </a:solidFill>
-                <a:latin typeface="Calibri"/>
+                <a:solidFill>val="FFFFFF"/&gt;</a:solidFill>
+                <a:latin typeface="Poppins"/>
               </a:rPr>
               <a:t>1. Quel est le rôle principal d'un OS ?</a:t>
             </a:r>
@@ -6889,10 +7056,8 @@
             </a:pPr>
             <a:r>
               <a:rPr sz="1400">
-                <a:solidFill>
-                  <a:srgbClr val="BBBBBB"/>
-                </a:solidFill>
-                <a:latin typeface="Calibri"/>
+                <a:solidFill>val="9AA7B6"/&gt;</a:solidFill>
+                <a:latin typeface="Poppins"/>
               </a:rPr>
               <a:t>      a) Dessiner des images</a:t>
             </a:r>
@@ -6905,10 +7070,8 @@
             </a:pPr>
             <a:r>
               <a:rPr sz="1400">
-                <a:solidFill>
-                  <a:srgbClr val="BBBBBB"/>
-                </a:solidFill>
-                <a:latin typeface="Calibri"/>
+                <a:solidFill>val="9AA7B6"/&gt;</a:solidFill>
+                <a:latin typeface="Poppins"/>
               </a:rPr>
               <a:t>      b) Gérer le matériel et les logiciels</a:t>
             </a:r>
@@ -6921,10 +7084,8 @@
             </a:pPr>
             <a:r>
               <a:rPr sz="1400">
-                <a:solidFill>
-                  <a:srgbClr val="BBBBBB"/>
-                </a:solidFill>
-                <a:latin typeface="Calibri"/>
+                <a:solidFill>val="9AA7B6"/&gt;</a:solidFill>
+                <a:latin typeface="Poppins"/>
               </a:rPr>
               <a:t>      c) Se connecter à Internet uniquement</a:t>
             </a:r>
@@ -6937,10 +7098,8 @@
             </a:pPr>
             <a:r>
               <a:rPr sz="1500" b="1">
-                <a:solidFill>
-                  <a:srgbClr val="FFFFFF"/>
-                </a:solidFill>
-                <a:latin typeface="Calibri"/>
+                <a:solidFill>val="FFFFFF"/&gt;</a:solidFill>
+                <a:latin typeface="Poppins"/>
               </a:rPr>
               <a:t>2. Quelle extension correspond à un document Word ?</a:t>
             </a:r>
@@ -6953,10 +7112,8 @@
             </a:pPr>
             <a:r>
               <a:rPr sz="1400">
-                <a:solidFill>
-                  <a:srgbClr val="BBBBBB"/>
-                </a:solidFill>
-                <a:latin typeface="Calibri"/>
+                <a:solidFill>val="9AA7B6"/&gt;</a:solidFill>
+                <a:latin typeface="Poppins"/>
               </a:rPr>
               <a:t>      a) .xlsx</a:t>
             </a:r>
@@ -6969,10 +7126,8 @@
             </a:pPr>
             <a:r>
               <a:rPr sz="1400">
-                <a:solidFill>
-                  <a:srgbClr val="BBBBBB"/>
-                </a:solidFill>
-                <a:latin typeface="Calibri"/>
+                <a:solidFill>val="9AA7B6"/&gt;</a:solidFill>
+                <a:latin typeface="Poppins"/>
               </a:rPr>
               <a:t>      b) .docx</a:t>
             </a:r>
@@ -6985,10 +7140,8 @@
             </a:pPr>
             <a:r>
               <a:rPr sz="1400">
-                <a:solidFill>
-                  <a:srgbClr val="BBBBBB"/>
-                </a:solidFill>
-                <a:latin typeface="Calibri"/>
+                <a:solidFill>val="9AA7B6"/&gt;</a:solidFill>
+                <a:latin typeface="Poppins"/>
               </a:rPr>
               <a:t>      c) .mp3</a:t>
             </a:r>
@@ -7001,10 +7154,8 @@
             </a:pPr>
             <a:r>
               <a:rPr sz="1500" b="1">
-                <a:solidFill>
-                  <a:srgbClr val="FFFFFF"/>
-                </a:solidFill>
-                <a:latin typeface="Calibri"/>
+                <a:solidFill>val="FFFFFF"/&gt;</a:solidFill>
+                <a:latin typeface="Poppins"/>
               </a:rPr>
               <a:t>3. Ctrl+Z permet de :</a:t>
             </a:r>
@@ -7017,10 +7168,8 @@
             </a:pPr>
             <a:r>
               <a:rPr sz="1400">
-                <a:solidFill>
-                  <a:srgbClr val="BBBBBB"/>
-                </a:solidFill>
-                <a:latin typeface="Calibri"/>
+                <a:solidFill>val="9AA7B6"/&gt;</a:solidFill>
+                <a:latin typeface="Poppins"/>
               </a:rPr>
               <a:t>      a) Copier</a:t>
             </a:r>
@@ -7033,10 +7182,8 @@
             </a:pPr>
             <a:r>
               <a:rPr sz="1400">
-                <a:solidFill>
-                  <a:srgbClr val="BBBBBB"/>
-                </a:solidFill>
-                <a:latin typeface="Calibri"/>
+                <a:solidFill>val="9AA7B6"/&gt;</a:solidFill>
+                <a:latin typeface="Poppins"/>
               </a:rPr>
               <a:t>      b) Annuler</a:t>
             </a:r>
@@ -7049,10 +7196,8 @@
             </a:pPr>
             <a:r>
               <a:rPr sz="1400">
-                <a:solidFill>
-                  <a:srgbClr val="BBBBBB"/>
-                </a:solidFill>
-                <a:latin typeface="Calibri"/>
+                <a:solidFill>val="9AA7B6"/&gt;</a:solidFill>
+                <a:latin typeface="Poppins"/>
               </a:rPr>
               <a:t>      c) Coller</a:t>
             </a:r>
@@ -7083,6 +7228,47 @@
           </a:prstGeom>
         </p:spPr>
       </p:pic>
+      <p:sp>
+        <p:nvSpPr>
+          <p:cNvPr id="990001" name="Pied de page FLE"/>
+          <p:cNvSpPr>
+            <a:spLocks noGrp="1"/>
+          </p:cNvSpPr>
+          <p:nvPr/>
+        </p:nvSpPr>
+        <p:spPr>
+          <a:xfrm>
+            <a:off x="4343400" y="-329184"/>
+            <a:ext cx="4572000" cy="274320"/>
+          </a:xfrm>
+          <a:prstGeom prst="rect">
+            <a:avLst/>
+          </a:prstGeom>
+        </p:spPr>
+        <p:txBody>
+          <a:bodyPr anchor="b"/>
+          <a:lstStyle/>
+          <a:p>
+            <a:pPr algn="r">
+              <a:defRPr sz="900">
+                <a:solidFill>
+                  <a:srgbClr val="9AA7B6"/>
+                </a:solidFill>
+                <a:latin typeface="Poppins"/>
+              </a:defRPr>
+            </a:pPr>
+            <a:r>
+              <a:rPr lang="fr-FR" sz="900">
+                <a:solidFill>
+                  <a:srgbClr val="9AA7B6"/>
+                </a:solidFill>
+                <a:latin typeface="Poppins"/>
+              </a:rPr>
+              <a:t>Université de Mostaganem — Dr. Madani BELACEL</a:t>
+            </a:r>
+          </a:p>
+        </p:txBody>
+      </p:sp>
     </p:spTree>
   </p:cSld>
   <p:clrMapOvr>
@@ -7096,9 +7282,7 @@
   <p:cSld>
     <p:bg>
       <p:bgPr>
-        <a:solidFill>
-          <a:srgbClr val="0B3D2E"/>
-        </a:solidFill>
+        <a:solidFill>val="004A38"/&gt;</a:solidFill>
         <a:effectLst/>
       </p:bgPr>
     </p:bg>
@@ -7123,9 +7307,7 @@
           <a:prstGeom prst="rect">
             <a:avLst/>
           </a:prstGeom>
-          <a:solidFill>
-            <a:srgbClr val="146B4A"/>
-          </a:solidFill>
+          <a:solidFill>val="007A55"/&gt;</a:solidFill>
           <a:ln>
             <a:noFill/>
           </a:ln>
@@ -7167,9 +7349,7 @@
           <a:prstGeom prst="rect">
             <a:avLst/>
           </a:prstGeom>
-          <a:solidFill>
-            <a:srgbClr val="FFD700"/>
-          </a:solidFill>
+          <a:solidFill>val="F0B429"/&gt;</a:solidFill>
           <a:ln>
             <a:noFill/>
           </a:ln>
@@ -7211,9 +7391,7 @@
           <a:prstGeom prst="rect">
             <a:avLst/>
           </a:prstGeom>
-          <a:solidFill>
-            <a:srgbClr val="FFD700"/>
-          </a:solidFill>
+          <a:solidFill>val="F0B429"/&gt;</a:solidFill>
           <a:ln>
             <a:noFill/>
           </a:ln>
@@ -7255,9 +7433,7 @@
           <a:prstGeom prst="rect">
             <a:avLst/>
           </a:prstGeom>
-          <a:solidFill>
-            <a:srgbClr val="146B4A"/>
-          </a:solidFill>
+          <a:solidFill>val="007A55"/&gt;</a:solidFill>
           <a:ln>
             <a:noFill/>
           </a:ln>
@@ -7310,10 +7486,8 @@
             <a:pPr algn="ctr"/>
             <a:r>
               <a:rPr sz="3000" b="1" i="0">
-                <a:solidFill>
-                  <a:srgbClr val="FFD700"/>
-                </a:solidFill>
-                <a:latin typeface="Calibri"/>
+                <a:solidFill>val="F0B429"/&gt;</a:solidFill>
+                <a:latin typeface="Poppins"/>
               </a:rPr>
               <a:t>Conclusion</a:t>
             </a:r>
@@ -7334,9 +7508,7 @@
           <a:prstGeom prst="rect">
             <a:avLst/>
           </a:prstGeom>
-          <a:solidFill>
-            <a:srgbClr val="146B4A"/>
-          </a:solidFill>
+          <a:solidFill>val="007A55"/&gt;</a:solidFill>
           <a:ln>
             <a:noFill/>
           </a:ln>
@@ -7393,10 +7565,8 @@
             </a:pPr>
             <a:r>
               <a:rPr sz="1800">
-                <a:solidFill>
-                  <a:srgbClr val="FFFFFF"/>
-                </a:solidFill>
-                <a:latin typeface="Calibri"/>
+                <a:solidFill>val="FFFFFF"/&gt;</a:solidFill>
+                <a:latin typeface="Poppins"/>
               </a:rPr>
               <a:t>▪  Windows fournit une interface graphique simple et puissante.</a:t>
             </a:r>
@@ -7409,10 +7579,8 @@
             </a:pPr>
             <a:r>
               <a:rPr sz="1800">
-                <a:solidFill>
-                  <a:srgbClr val="FFFFFF"/>
-                </a:solidFill>
-                <a:latin typeface="Calibri"/>
+                <a:solidFill>val="FFFFFF"/&gt;</a:solidFill>
+                <a:latin typeface="Poppins"/>
               </a:rPr>
               <a:t>▪  La maîtrise des fichiers, dossiers et raccourcis est essentielle.</a:t>
             </a:r>
@@ -7425,10 +7593,8 @@
             </a:pPr>
             <a:r>
               <a:rPr sz="1800">
-                <a:solidFill>
-                  <a:srgbClr val="FFFFFF"/>
-                </a:solidFill>
-                <a:latin typeface="Calibri"/>
+                <a:solidFill>val="FFFFFF"/&gt;</a:solidFill>
+                <a:latin typeface="Poppins"/>
               </a:rPr>
               <a:t>▪  Une bonne maintenance garantit performance et sécurité.</a:t>
             </a:r>
@@ -7441,10 +7607,8 @@
             </a:pPr>
             <a:r>
               <a:rPr sz="1800">
-                <a:solidFill>
-                  <a:srgbClr val="FFFFFF"/>
-                </a:solidFill>
-                <a:latin typeface="Calibri"/>
+                <a:solidFill>val="FFFFFF"/&gt;</a:solidFill>
+                <a:latin typeface="Poppins"/>
               </a:rPr>
               <a:t>▪  Prochain cours : Microsoft Word, traitement de texte.</a:t>
             </a:r>
@@ -7475,6 +7639,47 @@
           </a:prstGeom>
         </p:spPr>
       </p:pic>
+      <p:sp>
+        <p:nvSpPr>
+          <p:cNvPr id="990001" name="Pied de page FLE"/>
+          <p:cNvSpPr>
+            <a:spLocks noGrp="1"/>
+          </p:cNvSpPr>
+          <p:nvPr/>
+        </p:nvSpPr>
+        <p:spPr>
+          <a:xfrm>
+            <a:off x="4343400" y="-329184"/>
+            <a:ext cx="4572000" cy="274320"/>
+          </a:xfrm>
+          <a:prstGeom prst="rect">
+            <a:avLst/>
+          </a:prstGeom>
+        </p:spPr>
+        <p:txBody>
+          <a:bodyPr anchor="b"/>
+          <a:lstStyle/>
+          <a:p>
+            <a:pPr algn="r">
+              <a:defRPr sz="900">
+                <a:solidFill>
+                  <a:srgbClr val="9AA7B6"/>
+                </a:solidFill>
+                <a:latin typeface="Poppins"/>
+              </a:defRPr>
+            </a:pPr>
+            <a:r>
+              <a:rPr lang="fr-FR" sz="900">
+                <a:solidFill>
+                  <a:srgbClr val="9AA7B6"/>
+                </a:solidFill>
+                <a:latin typeface="Poppins"/>
+              </a:rPr>
+              <a:t>Université de Mostaganem — Dr. Madani BELACEL</a:t>
+            </a:r>
+          </a:p>
+        </p:txBody>
+      </p:sp>
     </p:spTree>
   </p:cSld>
   <p:clrMapOvr>
@@ -7488,9 +7693,7 @@
   <p:cSld>
     <p:bg>
       <p:bgPr>
-        <a:solidFill>
-          <a:srgbClr val="0B3D2E"/>
-        </a:solidFill>
+        <a:solidFill>val="004A38"/&gt;</a:solidFill>
         <a:effectLst/>
       </p:bgPr>
     </p:bg>
@@ -7515,9 +7718,7 @@
           <a:prstGeom prst="rect">
             <a:avLst/>
           </a:prstGeom>
-          <a:solidFill>
-            <a:srgbClr val="146B4A"/>
-          </a:solidFill>
+          <a:solidFill>val="007A55"/&gt;</a:solidFill>
           <a:ln>
             <a:noFill/>
           </a:ln>
@@ -7559,9 +7760,7 @@
           <a:prstGeom prst="rect">
             <a:avLst/>
           </a:prstGeom>
-          <a:solidFill>
-            <a:srgbClr val="FFD700"/>
-          </a:solidFill>
+          <a:solidFill>val="F0B429"/&gt;</a:solidFill>
           <a:ln>
             <a:noFill/>
           </a:ln>
@@ -7603,9 +7802,7 @@
           <a:prstGeom prst="rect">
             <a:avLst/>
           </a:prstGeom>
-          <a:solidFill>
-            <a:srgbClr val="FFD700"/>
-          </a:solidFill>
+          <a:solidFill>val="F0B429"/&gt;</a:solidFill>
           <a:ln>
             <a:noFill/>
           </a:ln>
@@ -7647,9 +7844,7 @@
           <a:prstGeom prst="rect">
             <a:avLst/>
           </a:prstGeom>
-          <a:solidFill>
-            <a:srgbClr val="146B4A"/>
-          </a:solidFill>
+          <a:solidFill>val="007A55"/&gt;</a:solidFill>
           <a:ln>
             <a:noFill/>
           </a:ln>
@@ -7702,10 +7897,8 @@
             <a:pPr algn="ctr"/>
             <a:r>
               <a:rPr sz="3200" b="1" i="0">
-                <a:solidFill>
-                  <a:srgbClr val="FFD700"/>
-                </a:solidFill>
-                <a:latin typeface="Calibri"/>
+                <a:solidFill>val="F0B429"/&gt;</a:solidFill>
+                <a:latin typeface="Poppins"/>
               </a:rPr>
               <a:t>Plan du cours</a:t>
             </a:r>
@@ -7741,10 +7934,8 @@
             </a:pPr>
             <a:r>
               <a:rPr sz="1900">
-                <a:solidFill>
-                  <a:srgbClr val="FFFFFF"/>
-                </a:solidFill>
-                <a:latin typeface="Calibri"/>
+                <a:solidFill>val="FFFFFF"/&gt;</a:solidFill>
+                <a:latin typeface="Poppins"/>
               </a:rPr>
               <a:t>▪  1. Rôle du système d'exploitation</a:t>
             </a:r>
@@ -7757,10 +7948,8 @@
             </a:pPr>
             <a:r>
               <a:rPr sz="1900">
-                <a:solidFill>
-                  <a:srgbClr val="FFFFFF"/>
-                </a:solidFill>
-                <a:latin typeface="Calibri"/>
+                <a:solidFill>val="FFFFFF"/&gt;</a:solidFill>
+                <a:latin typeface="Poppins"/>
               </a:rPr>
               <a:t>▪  2. Présentation de Windows</a:t>
             </a:r>
@@ -7773,10 +7962,8 @@
             </a:pPr>
             <a:r>
               <a:rPr sz="1900">
-                <a:solidFill>
-                  <a:srgbClr val="FFFFFF"/>
-                </a:solidFill>
-                <a:latin typeface="Calibri"/>
+                <a:solidFill>val="FFFFFF"/&gt;</a:solidFill>
+                <a:latin typeface="Poppins"/>
               </a:rPr>
               <a:t>▪  3. Le Bureau et la Barre des tâches</a:t>
             </a:r>
@@ -7789,10 +7976,8 @@
             </a:pPr>
             <a:r>
               <a:rPr sz="1900">
-                <a:solidFill>
-                  <a:srgbClr val="FFFFFF"/>
-                </a:solidFill>
-                <a:latin typeface="Calibri"/>
+                <a:solidFill>val="FFFFFF"/&gt;</a:solidFill>
+                <a:latin typeface="Poppins"/>
               </a:rPr>
               <a:t>▪  4. Gestion des fichiers et dossiers</a:t>
             </a:r>
@@ -7805,10 +7990,8 @@
             </a:pPr>
             <a:r>
               <a:rPr sz="1900">
-                <a:solidFill>
-                  <a:srgbClr val="FFFFFF"/>
-                </a:solidFill>
-                <a:latin typeface="Calibri"/>
+                <a:solidFill>val="FFFFFF"/&gt;</a:solidFill>
+                <a:latin typeface="Poppins"/>
               </a:rPr>
               <a:t>▪  5. Paramètres et personnalisation</a:t>
             </a:r>
@@ -7821,10 +8004,8 @@
             </a:pPr>
             <a:r>
               <a:rPr sz="1900">
-                <a:solidFill>
-                  <a:srgbClr val="FFFFFF"/>
-                </a:solidFill>
-                <a:latin typeface="Calibri"/>
+                <a:solidFill>val="FFFFFF"/&gt;</a:solidFill>
+                <a:latin typeface="Poppins"/>
               </a:rPr>
               <a:t>▪  6. Raccourcis clavier utiles</a:t>
             </a:r>
@@ -7837,12 +8018,51 @@
             </a:pPr>
             <a:r>
               <a:rPr sz="1900">
-                <a:solidFill>
-                  <a:srgbClr val="FFFFFF"/>
-                </a:solidFill>
-                <a:latin typeface="Calibri"/>
+                <a:solidFill>val="FFFFFF"/&gt;</a:solidFill>
+                <a:latin typeface="Poppins"/>
               </a:rPr>
               <a:t>▪  7. Maintenance et sécurité</a:t>
+            </a:r>
+          </a:p>
+        </p:txBody>
+      </p:sp>
+      <p:sp>
+        <p:nvSpPr>
+          <p:cNvPr id="990001" name="Pied de page FLE"/>
+          <p:cNvSpPr>
+            <a:spLocks noGrp="1"/>
+          </p:cNvSpPr>
+          <p:nvPr/>
+        </p:nvSpPr>
+        <p:spPr>
+          <a:xfrm>
+            <a:off x="4343400" y="-329184"/>
+            <a:ext cx="4572000" cy="274320"/>
+          </a:xfrm>
+          <a:prstGeom prst="rect">
+            <a:avLst/>
+          </a:prstGeom>
+        </p:spPr>
+        <p:txBody>
+          <a:bodyPr anchor="b"/>
+          <a:lstStyle/>
+          <a:p>
+            <a:pPr algn="r">
+              <a:defRPr sz="900">
+                <a:solidFill>
+                  <a:srgbClr val="9AA7B6"/>
+                </a:solidFill>
+                <a:latin typeface="Poppins"/>
+              </a:defRPr>
+            </a:pPr>
+            <a:r>
+              <a:rPr lang="fr-FR" sz="900">
+                <a:solidFill>
+                  <a:srgbClr val="9AA7B6"/>
+                </a:solidFill>
+                <a:latin typeface="Poppins"/>
+              </a:rPr>
+              <a:t>Université de Mostaganem — Dr. Madani BELACEL</a:t>
             </a:r>
           </a:p>
         </p:txBody>
@@ -7860,9 +8080,7 @@
   <p:cSld>
     <p:bg>
       <p:bgPr>
-        <a:solidFill>
-          <a:srgbClr val="0B3D2E"/>
-        </a:solidFill>
+        <a:solidFill>val="004A38"/&gt;</a:solidFill>
         <a:effectLst/>
       </p:bgPr>
     </p:bg>
@@ -7887,9 +8105,7 @@
           <a:prstGeom prst="rect">
             <a:avLst/>
           </a:prstGeom>
-          <a:solidFill>
-            <a:srgbClr val="146B4A"/>
-          </a:solidFill>
+          <a:solidFill>val="007A55"/&gt;</a:solidFill>
           <a:ln>
             <a:noFill/>
           </a:ln>
@@ -7931,9 +8147,7 @@
           <a:prstGeom prst="rect">
             <a:avLst/>
           </a:prstGeom>
-          <a:solidFill>
-            <a:srgbClr val="FFD700"/>
-          </a:solidFill>
+          <a:solidFill>val="F0B429"/&gt;</a:solidFill>
           <a:ln>
             <a:noFill/>
           </a:ln>
@@ -7975,9 +8189,7 @@
           <a:prstGeom prst="rect">
             <a:avLst/>
           </a:prstGeom>
-          <a:solidFill>
-            <a:srgbClr val="FFD700"/>
-          </a:solidFill>
+          <a:solidFill>val="F0B429"/&gt;</a:solidFill>
           <a:ln>
             <a:noFill/>
           </a:ln>
@@ -8019,9 +8231,7 @@
           <a:prstGeom prst="rect">
             <a:avLst/>
           </a:prstGeom>
-          <a:solidFill>
-            <a:srgbClr val="146B4A"/>
-          </a:solidFill>
+          <a:solidFill>val="007A55"/&gt;</a:solidFill>
           <a:ln>
             <a:noFill/>
           </a:ln>
@@ -8074,10 +8284,8 @@
             <a:pPr algn="l"/>
             <a:r>
               <a:rPr sz="3000" b="1" i="0">
-                <a:solidFill>
-                  <a:srgbClr val="FFD700"/>
-                </a:solidFill>
-                <a:latin typeface="Calibri"/>
+                <a:solidFill>val="F0B429"/&gt;</a:solidFill>
+                <a:latin typeface="Poppins"/>
               </a:rPr>
               <a:t>Références</a:t>
             </a:r>
@@ -8098,9 +8306,7 @@
           <a:prstGeom prst="rect">
             <a:avLst/>
           </a:prstGeom>
-          <a:solidFill>
-            <a:srgbClr val="146B4A"/>
-          </a:solidFill>
+          <a:solidFill>val="007A55"/&gt;</a:solidFill>
           <a:ln>
             <a:noFill/>
           </a:ln>
@@ -8157,10 +8363,8 @@
             </a:pPr>
             <a:r>
               <a:rPr sz="1500">
-                <a:solidFill>
-                  <a:srgbClr val="BBBBBB"/>
-                </a:solidFill>
-                <a:latin typeface="Calibri"/>
+                <a:solidFill>val="9AA7B6"/&gt;</a:solidFill>
+                <a:latin typeface="Poppins"/>
               </a:rPr>
               <a:t>- Microsoft Support - documentation Windows 10/11.</a:t>
             </a:r>
@@ -8173,10 +8377,8 @@
             </a:pPr>
             <a:r>
               <a:rPr sz="1500">
-                <a:solidFill>
-                  <a:srgbClr val="BBBBBB"/>
-                </a:solidFill>
-                <a:latin typeface="Calibri"/>
+                <a:solidFill>val="9AA7B6"/&gt;</a:solidFill>
+                <a:latin typeface="Poppins"/>
               </a:rPr>
               <a:t>- M. Bideaud et al., « Windows 10 pour les nuls », First Interactive.</a:t>
             </a:r>
@@ -8189,10 +8391,8 @@
             </a:pPr>
             <a:r>
               <a:rPr sz="1500">
-                <a:solidFill>
-                  <a:srgbClr val="BBBBBB"/>
-                </a:solidFill>
-                <a:latin typeface="Calibri"/>
+                <a:solidFill>val="9AA7B6"/&gt;</a:solidFill>
+                <a:latin typeface="Poppins"/>
               </a:rPr>
               <a:t>- Supports de cours Module TIC, Université de Mostaganem.</a:t>
             </a:r>
@@ -8205,10 +8405,8 @@
             </a:pPr>
             <a:r>
               <a:rPr sz="1500">
-                <a:solidFill>
-                  <a:srgbClr val="BBBBBB"/>
-                </a:solidFill>
-                <a:latin typeface="Calibri"/>
+                <a:solidFill>val="9AA7B6"/&gt;</a:solidFill>
+                <a:latin typeface="Poppins"/>
               </a:rPr>
               <a:t>- support.microsoft.com</a:t>
             </a:r>
@@ -8239,6 +8437,47 @@
           </a:prstGeom>
         </p:spPr>
       </p:pic>
+      <p:sp>
+        <p:nvSpPr>
+          <p:cNvPr id="990001" name="Pied de page FLE"/>
+          <p:cNvSpPr>
+            <a:spLocks noGrp="1"/>
+          </p:cNvSpPr>
+          <p:nvPr/>
+        </p:nvSpPr>
+        <p:spPr>
+          <a:xfrm>
+            <a:off x="4343400" y="-329184"/>
+            <a:ext cx="4572000" cy="274320"/>
+          </a:xfrm>
+          <a:prstGeom prst="rect">
+            <a:avLst/>
+          </a:prstGeom>
+        </p:spPr>
+        <p:txBody>
+          <a:bodyPr anchor="b"/>
+          <a:lstStyle/>
+          <a:p>
+            <a:pPr algn="r">
+              <a:defRPr sz="900">
+                <a:solidFill>
+                  <a:srgbClr val="9AA7B6"/>
+                </a:solidFill>
+                <a:latin typeface="Poppins"/>
+              </a:defRPr>
+            </a:pPr>
+            <a:r>
+              <a:rPr lang="fr-FR" sz="900">
+                <a:solidFill>
+                  <a:srgbClr val="9AA7B6"/>
+                </a:solidFill>
+                <a:latin typeface="Poppins"/>
+              </a:rPr>
+              <a:t>Université de Mostaganem — Dr. Madani BELACEL</a:t>
+            </a:r>
+          </a:p>
+        </p:txBody>
+      </p:sp>
     </p:spTree>
   </p:cSld>
   <p:clrMapOvr>
@@ -8252,9 +8491,7 @@
   <p:cSld>
     <p:bg>
       <p:bgPr>
-        <a:solidFill>
-          <a:srgbClr val="0B3D2E"/>
-        </a:solidFill>
+        <a:solidFill>val="004A38"/&gt;</a:solidFill>
         <a:effectLst/>
       </p:bgPr>
     </p:bg>
@@ -8279,9 +8516,7 @@
           <a:prstGeom prst="rect">
             <a:avLst/>
           </a:prstGeom>
-          <a:solidFill>
-            <a:srgbClr val="146B4A"/>
-          </a:solidFill>
+          <a:solidFill>val="007A55"/&gt;</a:solidFill>
           <a:ln>
             <a:noFill/>
           </a:ln>
@@ -8323,9 +8558,7 @@
           <a:prstGeom prst="rect">
             <a:avLst/>
           </a:prstGeom>
-          <a:solidFill>
-            <a:srgbClr val="FFD700"/>
-          </a:solidFill>
+          <a:solidFill>val="F0B429"/&gt;</a:solidFill>
           <a:ln>
             <a:noFill/>
           </a:ln>
@@ -8367,9 +8600,7 @@
           <a:prstGeom prst="rect">
             <a:avLst/>
           </a:prstGeom>
-          <a:solidFill>
-            <a:srgbClr val="FFD700"/>
-          </a:solidFill>
+          <a:solidFill>val="F0B429"/&gt;</a:solidFill>
           <a:ln>
             <a:noFill/>
           </a:ln>
@@ -8411,9 +8642,7 @@
           <a:prstGeom prst="rect">
             <a:avLst/>
           </a:prstGeom>
-          <a:solidFill>
-            <a:srgbClr val="146B4A"/>
-          </a:solidFill>
+          <a:solidFill>val="007A55"/&gt;</a:solidFill>
           <a:ln>
             <a:noFill/>
           </a:ln>
@@ -8455,9 +8684,7 @@
           <a:prstGeom prst="rect">
             <a:avLst/>
           </a:prstGeom>
-          <a:solidFill>
-            <a:srgbClr val="FFD700"/>
-          </a:solidFill>
+          <a:solidFill>val="F0B429"/&gt;</a:solidFill>
           <a:ln>
             <a:noFill/>
           </a:ln>
@@ -8510,10 +8737,8 @@
             <a:pPr algn="ctr"/>
             <a:r>
               <a:rPr sz="3800" b="1" i="0">
-                <a:solidFill>
-                  <a:srgbClr val="FFD700"/>
-                </a:solidFill>
-                <a:latin typeface="Calibri"/>
+                <a:solidFill>val="F0B429"/&gt;</a:solidFill>
+                <a:latin typeface="Poppins"/>
               </a:rPr>
               <a:t>Merci de votre attention !</a:t>
             </a:r>
@@ -8545,10 +8770,8 @@
             <a:pPr algn="ctr"/>
             <a:r>
               <a:rPr sz="2600" b="0" i="0">
-                <a:solidFill>
-                  <a:srgbClr val="FFFFFF"/>
-                </a:solidFill>
-                <a:latin typeface="Calibri"/>
+                <a:solidFill>val="FFFFFF"/&gt;</a:solidFill>
+                <a:latin typeface="Poppins"/>
               </a:rPr>
               <a:t>Des questions ?</a:t>
             </a:r>
@@ -8580,10 +8803,8 @@
             <a:pPr algn="ctr"/>
             <a:r>
               <a:rPr sz="1600" b="0" i="0">
-                <a:solidFill>
-                  <a:srgbClr val="BBBBBB"/>
-                </a:solidFill>
-                <a:latin typeface="Calibri"/>
+                <a:solidFill>val="9AA7B6"/&gt;</a:solidFill>
+                <a:latin typeface="Poppins"/>
               </a:rPr>
               <a:t>Dr. BELACEL Madani</a:t>
             </a:r>
@@ -8614,6 +8835,47 @@
           </a:prstGeom>
         </p:spPr>
       </p:pic>
+      <p:sp>
+        <p:nvSpPr>
+          <p:cNvPr id="990001" name="Pied de page FLE"/>
+          <p:cNvSpPr>
+            <a:spLocks noGrp="1"/>
+          </p:cNvSpPr>
+          <p:nvPr/>
+        </p:nvSpPr>
+        <p:spPr>
+          <a:xfrm>
+            <a:off x="4343400" y="-329184"/>
+            <a:ext cx="4572000" cy="274320"/>
+          </a:xfrm>
+          <a:prstGeom prst="rect">
+            <a:avLst/>
+          </a:prstGeom>
+        </p:spPr>
+        <p:txBody>
+          <a:bodyPr anchor="b"/>
+          <a:lstStyle/>
+          <a:p>
+            <a:pPr algn="r">
+              <a:defRPr sz="900">
+                <a:solidFill>
+                  <a:srgbClr val="9AA7B6"/>
+                </a:solidFill>
+                <a:latin typeface="Poppins"/>
+              </a:defRPr>
+            </a:pPr>
+            <a:r>
+              <a:rPr lang="fr-FR" sz="900">
+                <a:solidFill>
+                  <a:srgbClr val="9AA7B6"/>
+                </a:solidFill>
+                <a:latin typeface="Poppins"/>
+              </a:rPr>
+              <a:t>Université de Mostaganem — Dr. Madani BELACEL</a:t>
+            </a:r>
+          </a:p>
+        </p:txBody>
+      </p:sp>
     </p:spTree>
   </p:cSld>
   <p:clrMapOvr>
@@ -8627,9 +8889,7 @@
   <p:cSld>
     <p:bg>
       <p:bgPr>
-        <a:solidFill>
-          <a:srgbClr val="0B3D2E"/>
-        </a:solidFill>
+        <a:solidFill>val="004A38"/&gt;</a:solidFill>
         <a:effectLst/>
       </p:bgPr>
     </p:bg>
@@ -8654,9 +8914,7 @@
           <a:prstGeom prst="rect">
             <a:avLst/>
           </a:prstGeom>
-          <a:solidFill>
-            <a:srgbClr val="146B4A"/>
-          </a:solidFill>
+          <a:solidFill>val="007A55"/&gt;</a:solidFill>
           <a:ln>
             <a:noFill/>
           </a:ln>
@@ -8698,9 +8956,7 @@
           <a:prstGeom prst="rect">
             <a:avLst/>
           </a:prstGeom>
-          <a:solidFill>
-            <a:srgbClr val="FFD700"/>
-          </a:solidFill>
+          <a:solidFill>val="F0B429"/&gt;</a:solidFill>
           <a:ln>
             <a:noFill/>
           </a:ln>
@@ -8742,9 +8998,7 @@
           <a:prstGeom prst="rect">
             <a:avLst/>
           </a:prstGeom>
-          <a:solidFill>
-            <a:srgbClr val="FFD700"/>
-          </a:solidFill>
+          <a:solidFill>val="F0B429"/&gt;</a:solidFill>
           <a:ln>
             <a:noFill/>
           </a:ln>
@@ -8786,9 +9040,7 @@
           <a:prstGeom prst="rect">
             <a:avLst/>
           </a:prstGeom>
-          <a:solidFill>
-            <a:srgbClr val="146B4A"/>
-          </a:solidFill>
+          <a:solidFill>val="007A55"/&gt;</a:solidFill>
           <a:ln>
             <a:noFill/>
           </a:ln>
@@ -8830,9 +9082,7 @@
           <a:prstGeom prst="rect">
             <a:avLst/>
           </a:prstGeom>
-          <a:solidFill>
-            <a:srgbClr val="146B4A"/>
-          </a:solidFill>
+          <a:solidFill>val="007A55"/&gt;</a:solidFill>
           <a:ln>
             <a:noFill/>
           </a:ln>
@@ -8885,10 +9135,8 @@
             <a:pPr algn="ctr"/>
             <a:r>
               <a:rPr sz="2200" b="1" i="0">
-                <a:solidFill>
-                  <a:srgbClr val="BBBBBB"/>
-                </a:solidFill>
-                <a:latin typeface="Calibri"/>
+                <a:solidFill>val="9AA7B6"/&gt;</a:solidFill>
+                <a:latin typeface="Poppins"/>
               </a:rPr>
               <a:t>Section 1</a:t>
             </a:r>
@@ -8920,10 +9168,8 @@
             <a:pPr algn="ctr"/>
             <a:r>
               <a:rPr sz="2800" b="1" i="0">
-                <a:solidFill>
-                  <a:srgbClr val="FFD700"/>
-                </a:solidFill>
-                <a:latin typeface="Calibri"/>
+                <a:solidFill>val="F0B429"/&gt;</a:solidFill>
+                <a:latin typeface="Poppins"/>
               </a:rPr>
               <a:t>Rôle du système d'exploitation</a:t>
             </a:r>
@@ -8954,6 +9200,47 @@
           </a:prstGeom>
         </p:spPr>
       </p:pic>
+      <p:sp>
+        <p:nvSpPr>
+          <p:cNvPr id="990001" name="Pied de page FLE"/>
+          <p:cNvSpPr>
+            <a:spLocks noGrp="1"/>
+          </p:cNvSpPr>
+          <p:nvPr/>
+        </p:nvSpPr>
+        <p:spPr>
+          <a:xfrm>
+            <a:off x="4343400" y="-329184"/>
+            <a:ext cx="4572000" cy="274320"/>
+          </a:xfrm>
+          <a:prstGeom prst="rect">
+            <a:avLst/>
+          </a:prstGeom>
+        </p:spPr>
+        <p:txBody>
+          <a:bodyPr anchor="b"/>
+          <a:lstStyle/>
+          <a:p>
+            <a:pPr algn="r">
+              <a:defRPr sz="900">
+                <a:solidFill>
+                  <a:srgbClr val="9AA7B6"/>
+                </a:solidFill>
+                <a:latin typeface="Poppins"/>
+              </a:defRPr>
+            </a:pPr>
+            <a:r>
+              <a:rPr lang="fr-FR" sz="900">
+                <a:solidFill>
+                  <a:srgbClr val="9AA7B6"/>
+                </a:solidFill>
+                <a:latin typeface="Poppins"/>
+              </a:rPr>
+              <a:t>Université de Mostaganem — Dr. Madani BELACEL</a:t>
+            </a:r>
+          </a:p>
+        </p:txBody>
+      </p:sp>
     </p:spTree>
   </p:cSld>
   <p:clrMapOvr>
@@ -8967,9 +9254,7 @@
   <p:cSld>
     <p:bg>
       <p:bgPr>
-        <a:solidFill>
-          <a:srgbClr val="0B3D2E"/>
-        </a:solidFill>
+        <a:solidFill>val="004A38"/&gt;</a:solidFill>
         <a:effectLst/>
       </p:bgPr>
     </p:bg>
@@ -8994,9 +9279,7 @@
           <a:prstGeom prst="rect">
             <a:avLst/>
           </a:prstGeom>
-          <a:solidFill>
-            <a:srgbClr val="146B4A"/>
-          </a:solidFill>
+          <a:solidFill>val="007A55"/&gt;</a:solidFill>
           <a:ln>
             <a:noFill/>
           </a:ln>
@@ -9038,9 +9321,7 @@
           <a:prstGeom prst="rect">
             <a:avLst/>
           </a:prstGeom>
-          <a:solidFill>
-            <a:srgbClr val="FFD700"/>
-          </a:solidFill>
+          <a:solidFill>val="F0B429"/&gt;</a:solidFill>
           <a:ln>
             <a:noFill/>
           </a:ln>
@@ -9082,9 +9363,7 @@
           <a:prstGeom prst="rect">
             <a:avLst/>
           </a:prstGeom>
-          <a:solidFill>
-            <a:srgbClr val="FFD700"/>
-          </a:solidFill>
+          <a:solidFill>val="F0B429"/&gt;</a:solidFill>
           <a:ln>
             <a:noFill/>
           </a:ln>
@@ -9126,9 +9405,7 @@
           <a:prstGeom prst="rect">
             <a:avLst/>
           </a:prstGeom>
-          <a:solidFill>
-            <a:srgbClr val="146B4A"/>
-          </a:solidFill>
+          <a:solidFill>val="007A55"/&gt;</a:solidFill>
           <a:ln>
             <a:noFill/>
           </a:ln>
@@ -9181,10 +9458,8 @@
             <a:pPr algn="l"/>
             <a:r>
               <a:rPr sz="2400" b="1" i="0">
-                <a:solidFill>
-                  <a:srgbClr val="FFD700"/>
-                </a:solidFill>
-                <a:latin typeface="Calibri"/>
+                <a:solidFill>val="F0B429"/&gt;</a:solidFill>
+                <a:latin typeface="Poppins"/>
               </a:rPr>
               <a:t>1 - Rôle du système d'exploitation</a:t>
             </a:r>
@@ -9205,9 +9480,7 @@
           <a:prstGeom prst="rect">
             <a:avLst/>
           </a:prstGeom>
-          <a:solidFill>
-            <a:srgbClr val="146B4A"/>
-          </a:solidFill>
+          <a:solidFill>val="007A55"/&gt;</a:solidFill>
           <a:ln>
             <a:noFill/>
           </a:ln>
@@ -9264,10 +9537,8 @@
             </a:pPr>
             <a:r>
               <a:rPr sz="1800">
-                <a:solidFill>
-                  <a:srgbClr val="FFFFFF"/>
-                </a:solidFill>
-                <a:latin typeface="Calibri"/>
+                <a:solidFill>val="FFFFFF"/&gt;</a:solidFill>
+                <a:latin typeface="Poppins"/>
               </a:rPr>
               <a:t>▪  Intermédiaire entre l'utilisateur et le matériel.</a:t>
             </a:r>
@@ -9280,10 +9551,8 @@
             </a:pPr>
             <a:r>
               <a:rPr sz="1800">
-                <a:solidFill>
-                  <a:srgbClr val="FFFFFF"/>
-                </a:solidFill>
-                <a:latin typeface="Calibri"/>
+                <a:solidFill>val="FFFFFF"/&gt;</a:solidFill>
+                <a:latin typeface="Poppins"/>
               </a:rPr>
               <a:t>▪  Gère le processeur, la mémoire, les fichiers et les périphériques.</a:t>
             </a:r>
@@ -9296,10 +9565,8 @@
             </a:pPr>
             <a:r>
               <a:rPr sz="1800">
-                <a:solidFill>
-                  <a:srgbClr val="FFFFFF"/>
-                </a:solidFill>
-                <a:latin typeface="Calibri"/>
+                <a:solidFill>val="FFFFFF"/&gt;</a:solidFill>
+                <a:latin typeface="Poppins"/>
               </a:rPr>
               <a:t>▪  Fournit une interface graphique conviviale (GUI).</a:t>
             </a:r>
@@ -9312,10 +9579,8 @@
             </a:pPr>
             <a:r>
               <a:rPr sz="1800">
-                <a:solidFill>
-                  <a:srgbClr val="FFFFFF"/>
-                </a:solidFill>
-                <a:latin typeface="Calibri"/>
+                <a:solidFill>val="FFFFFF"/&gt;</a:solidFill>
+                <a:latin typeface="Poppins"/>
               </a:rPr>
               <a:t>▪  Exemples : Windows, Linux, macOS, Android, iOS.</a:t>
             </a:r>
@@ -9346,6 +9611,47 @@
           </a:prstGeom>
         </p:spPr>
       </p:pic>
+      <p:sp>
+        <p:nvSpPr>
+          <p:cNvPr id="990001" name="Pied de page FLE"/>
+          <p:cNvSpPr>
+            <a:spLocks noGrp="1"/>
+          </p:cNvSpPr>
+          <p:nvPr/>
+        </p:nvSpPr>
+        <p:spPr>
+          <a:xfrm>
+            <a:off x="4343400" y="-329184"/>
+            <a:ext cx="4572000" cy="274320"/>
+          </a:xfrm>
+          <a:prstGeom prst="rect">
+            <a:avLst/>
+          </a:prstGeom>
+        </p:spPr>
+        <p:txBody>
+          <a:bodyPr anchor="b"/>
+          <a:lstStyle/>
+          <a:p>
+            <a:pPr algn="r">
+              <a:defRPr sz="900">
+                <a:solidFill>
+                  <a:srgbClr val="9AA7B6"/>
+                </a:solidFill>
+                <a:latin typeface="Poppins"/>
+              </a:defRPr>
+            </a:pPr>
+            <a:r>
+              <a:rPr lang="fr-FR" sz="900">
+                <a:solidFill>
+                  <a:srgbClr val="9AA7B6"/>
+                </a:solidFill>
+                <a:latin typeface="Poppins"/>
+              </a:rPr>
+              <a:t>Université de Mostaganem — Dr. Madani BELACEL</a:t>
+            </a:r>
+          </a:p>
+        </p:txBody>
+      </p:sp>
     </p:spTree>
   </p:cSld>
   <p:clrMapOvr>
@@ -9359,9 +9665,7 @@
   <p:cSld>
     <p:bg>
       <p:bgPr>
-        <a:solidFill>
-          <a:srgbClr val="0B3D2E"/>
-        </a:solidFill>
+        <a:solidFill>val="004A38"/&gt;</a:solidFill>
         <a:effectLst/>
       </p:bgPr>
     </p:bg>
@@ -9386,9 +9690,7 @@
           <a:prstGeom prst="rect">
             <a:avLst/>
           </a:prstGeom>
-          <a:solidFill>
-            <a:srgbClr val="146B4A"/>
-          </a:solidFill>
+          <a:solidFill>val="007A55"/&gt;</a:solidFill>
           <a:ln>
             <a:noFill/>
           </a:ln>
@@ -9430,9 +9732,7 @@
           <a:prstGeom prst="rect">
             <a:avLst/>
           </a:prstGeom>
-          <a:solidFill>
-            <a:srgbClr val="FFD700"/>
-          </a:solidFill>
+          <a:solidFill>val="F0B429"/&gt;</a:solidFill>
           <a:ln>
             <a:noFill/>
           </a:ln>
@@ -9474,9 +9774,7 @@
           <a:prstGeom prst="rect">
             <a:avLst/>
           </a:prstGeom>
-          <a:solidFill>
-            <a:srgbClr val="FFD700"/>
-          </a:solidFill>
+          <a:solidFill>val="F0B429"/&gt;</a:solidFill>
           <a:ln>
             <a:noFill/>
           </a:ln>
@@ -9518,9 +9816,7 @@
           <a:prstGeom prst="rect">
             <a:avLst/>
           </a:prstGeom>
-          <a:solidFill>
-            <a:srgbClr val="146B4A"/>
-          </a:solidFill>
+          <a:solidFill>val="007A55"/&gt;</a:solidFill>
           <a:ln>
             <a:noFill/>
           </a:ln>
@@ -9562,9 +9858,7 @@
           <a:prstGeom prst="rect">
             <a:avLst/>
           </a:prstGeom>
-          <a:solidFill>
-            <a:srgbClr val="146B4A"/>
-          </a:solidFill>
+          <a:solidFill>val="007A55"/&gt;</a:solidFill>
           <a:ln>
             <a:noFill/>
           </a:ln>
@@ -9617,10 +9911,8 @@
             <a:pPr algn="ctr"/>
             <a:r>
               <a:rPr sz="2200" b="1" i="0">
-                <a:solidFill>
-                  <a:srgbClr val="BBBBBB"/>
-                </a:solidFill>
-                <a:latin typeface="Calibri"/>
+                <a:solidFill>val="9AA7B6"/&gt;</a:solidFill>
+                <a:latin typeface="Poppins"/>
               </a:rPr>
               <a:t>Section 2</a:t>
             </a:r>
@@ -9652,10 +9944,8 @@
             <a:pPr algn="ctr"/>
             <a:r>
               <a:rPr sz="2800" b="1" i="0">
-                <a:solidFill>
-                  <a:srgbClr val="FFD700"/>
-                </a:solidFill>
-                <a:latin typeface="Calibri"/>
+                <a:solidFill>val="F0B429"/&gt;</a:solidFill>
+                <a:latin typeface="Poppins"/>
               </a:rPr>
               <a:t>Présentation de Windows</a:t>
             </a:r>
@@ -9686,6 +9976,47 @@
           </a:prstGeom>
         </p:spPr>
       </p:pic>
+      <p:sp>
+        <p:nvSpPr>
+          <p:cNvPr id="990001" name="Pied de page FLE"/>
+          <p:cNvSpPr>
+            <a:spLocks noGrp="1"/>
+          </p:cNvSpPr>
+          <p:nvPr/>
+        </p:nvSpPr>
+        <p:spPr>
+          <a:xfrm>
+            <a:off x="4343400" y="-329184"/>
+            <a:ext cx="4572000" cy="274320"/>
+          </a:xfrm>
+          <a:prstGeom prst="rect">
+            <a:avLst/>
+          </a:prstGeom>
+        </p:spPr>
+        <p:txBody>
+          <a:bodyPr anchor="b"/>
+          <a:lstStyle/>
+          <a:p>
+            <a:pPr algn="r">
+              <a:defRPr sz="900">
+                <a:solidFill>
+                  <a:srgbClr val="9AA7B6"/>
+                </a:solidFill>
+                <a:latin typeface="Poppins"/>
+              </a:defRPr>
+            </a:pPr>
+            <a:r>
+              <a:rPr lang="fr-FR" sz="900">
+                <a:solidFill>
+                  <a:srgbClr val="9AA7B6"/>
+                </a:solidFill>
+                <a:latin typeface="Poppins"/>
+              </a:rPr>
+              <a:t>Université de Mostaganem — Dr. Madani BELACEL</a:t>
+            </a:r>
+          </a:p>
+        </p:txBody>
+      </p:sp>
     </p:spTree>
   </p:cSld>
   <p:clrMapOvr>
@@ -9699,9 +10030,7 @@
   <p:cSld>
     <p:bg>
       <p:bgPr>
-        <a:solidFill>
-          <a:srgbClr val="0B3D2E"/>
-        </a:solidFill>
+        <a:solidFill>val="004A38"/&gt;</a:solidFill>
         <a:effectLst/>
       </p:bgPr>
     </p:bg>
@@ -9726,9 +10055,7 @@
           <a:prstGeom prst="rect">
             <a:avLst/>
           </a:prstGeom>
-          <a:solidFill>
-            <a:srgbClr val="146B4A"/>
-          </a:solidFill>
+          <a:solidFill>val="007A55"/&gt;</a:solidFill>
           <a:ln>
             <a:noFill/>
           </a:ln>
@@ -9770,9 +10097,7 @@
           <a:prstGeom prst="rect">
             <a:avLst/>
           </a:prstGeom>
-          <a:solidFill>
-            <a:srgbClr val="FFD700"/>
-          </a:solidFill>
+          <a:solidFill>val="F0B429"/&gt;</a:solidFill>
           <a:ln>
             <a:noFill/>
           </a:ln>
@@ -9814,9 +10139,7 @@
           <a:prstGeom prst="rect">
             <a:avLst/>
           </a:prstGeom>
-          <a:solidFill>
-            <a:srgbClr val="FFD700"/>
-          </a:solidFill>
+          <a:solidFill>val="F0B429"/&gt;</a:solidFill>
           <a:ln>
             <a:noFill/>
           </a:ln>
@@ -9858,9 +10181,7 @@
           <a:prstGeom prst="rect">
             <a:avLst/>
           </a:prstGeom>
-          <a:solidFill>
-            <a:srgbClr val="146B4A"/>
-          </a:solidFill>
+          <a:solidFill>val="007A55"/&gt;</a:solidFill>
           <a:ln>
             <a:noFill/>
           </a:ln>
@@ -9913,10 +10234,8 @@
             <a:pPr algn="l"/>
             <a:r>
               <a:rPr sz="2400" b="1" i="0">
-                <a:solidFill>
-                  <a:srgbClr val="FFD700"/>
-                </a:solidFill>
-                <a:latin typeface="Calibri"/>
+                <a:solidFill>val="F0B429"/&gt;</a:solidFill>
+                <a:latin typeface="Poppins"/>
               </a:rPr>
               <a:t>2 - Présentation de Windows</a:t>
             </a:r>
@@ -9937,9 +10256,7 @@
           <a:prstGeom prst="rect">
             <a:avLst/>
           </a:prstGeom>
-          <a:solidFill>
-            <a:srgbClr val="146B4A"/>
-          </a:solidFill>
+          <a:solidFill>val="007A55"/&gt;</a:solidFill>
           <a:ln>
             <a:noFill/>
           </a:ln>
@@ -9996,10 +10313,8 @@
             </a:pPr>
             <a:r>
               <a:rPr sz="1800">
-                <a:solidFill>
-                  <a:srgbClr val="FFFFFF"/>
-                </a:solidFill>
-                <a:latin typeface="Calibri"/>
+                <a:solidFill>val="FFFFFF"/&gt;</a:solidFill>
+                <a:latin typeface="Poppins"/>
               </a:rPr>
               <a:t>▪  Développé par Microsoft depuis 1985.</a:t>
             </a:r>
@@ -10012,10 +10327,8 @@
             </a:pPr>
             <a:r>
               <a:rPr sz="1800">
-                <a:solidFill>
-                  <a:srgbClr val="FFFFFF"/>
-                </a:solidFill>
-                <a:latin typeface="Calibri"/>
+                <a:solidFill>val="FFFFFF"/&gt;</a:solidFill>
+                <a:latin typeface="Poppins"/>
               </a:rPr>
               <a:t>▪  Versions : XP, 7, 8, 10, 11.</a:t>
             </a:r>
@@ -10028,10 +10341,8 @@
             </a:pPr>
             <a:r>
               <a:rPr sz="1800">
-                <a:solidFill>
-                  <a:srgbClr val="FFFFFF"/>
-                </a:solidFill>
-                <a:latin typeface="Calibri"/>
+                <a:solidFill>val="FFFFFF"/&gt;</a:solidFill>
+                <a:latin typeface="Poppins"/>
               </a:rPr>
               <a:t>▪  Interface graphique : fenêtres, icônes, menus, pointeur (WIMP).</a:t>
             </a:r>
@@ -10044,10 +10355,8 @@
             </a:pPr>
             <a:r>
               <a:rPr sz="1800">
-                <a:solidFill>
-                  <a:srgbClr val="FFFFFF"/>
-                </a:solidFill>
-                <a:latin typeface="Calibri"/>
+                <a:solidFill>val="FFFFFF"/&gt;</a:solidFill>
+                <a:latin typeface="Poppins"/>
               </a:rPr>
               <a:t>▪  Multi-tâches et multi-utilisateurs.</a:t>
             </a:r>
@@ -10078,6 +10387,47 @@
           </a:prstGeom>
         </p:spPr>
       </p:pic>
+      <p:sp>
+        <p:nvSpPr>
+          <p:cNvPr id="990001" name="Pied de page FLE"/>
+          <p:cNvSpPr>
+            <a:spLocks noGrp="1"/>
+          </p:cNvSpPr>
+          <p:nvPr/>
+        </p:nvSpPr>
+        <p:spPr>
+          <a:xfrm>
+            <a:off x="4343400" y="-329184"/>
+            <a:ext cx="4572000" cy="274320"/>
+          </a:xfrm>
+          <a:prstGeom prst="rect">
+            <a:avLst/>
+          </a:prstGeom>
+        </p:spPr>
+        <p:txBody>
+          <a:bodyPr anchor="b"/>
+          <a:lstStyle/>
+          <a:p>
+            <a:pPr algn="r">
+              <a:defRPr sz="900">
+                <a:solidFill>
+                  <a:srgbClr val="9AA7B6"/>
+                </a:solidFill>
+                <a:latin typeface="Poppins"/>
+              </a:defRPr>
+            </a:pPr>
+            <a:r>
+              <a:rPr lang="fr-FR" sz="900">
+                <a:solidFill>
+                  <a:srgbClr val="9AA7B6"/>
+                </a:solidFill>
+                <a:latin typeface="Poppins"/>
+              </a:rPr>
+              <a:t>Université de Mostaganem — Dr. Madani BELACEL</a:t>
+            </a:r>
+          </a:p>
+        </p:txBody>
+      </p:sp>
     </p:spTree>
   </p:cSld>
   <p:clrMapOvr>
@@ -10091,9 +10441,7 @@
   <p:cSld>
     <p:bg>
       <p:bgPr>
-        <a:solidFill>
-          <a:srgbClr val="0B3D2E"/>
-        </a:solidFill>
+        <a:solidFill>val="004A38"/&gt;</a:solidFill>
         <a:effectLst/>
       </p:bgPr>
     </p:bg>
@@ -10118,9 +10466,7 @@
           <a:prstGeom prst="rect">
             <a:avLst/>
           </a:prstGeom>
-          <a:solidFill>
-            <a:srgbClr val="146B4A"/>
-          </a:solidFill>
+          <a:solidFill>val="007A55"/&gt;</a:solidFill>
           <a:ln>
             <a:noFill/>
           </a:ln>
@@ -10162,9 +10508,7 @@
           <a:prstGeom prst="rect">
             <a:avLst/>
           </a:prstGeom>
-          <a:solidFill>
-            <a:srgbClr val="FFD700"/>
-          </a:solidFill>
+          <a:solidFill>val="F0B429"/&gt;</a:solidFill>
           <a:ln>
             <a:noFill/>
           </a:ln>
@@ -10206,9 +10550,7 @@
           <a:prstGeom prst="rect">
             <a:avLst/>
           </a:prstGeom>
-          <a:solidFill>
-            <a:srgbClr val="FFD700"/>
-          </a:solidFill>
+          <a:solidFill>val="F0B429"/&gt;</a:solidFill>
           <a:ln>
             <a:noFill/>
           </a:ln>
@@ -10250,9 +10592,7 @@
           <a:prstGeom prst="rect">
             <a:avLst/>
           </a:prstGeom>
-          <a:solidFill>
-            <a:srgbClr val="146B4A"/>
-          </a:solidFill>
+          <a:solidFill>val="007A55"/&gt;</a:solidFill>
           <a:ln>
             <a:noFill/>
           </a:ln>
@@ -10294,9 +10634,7 @@
           <a:prstGeom prst="rect">
             <a:avLst/>
           </a:prstGeom>
-          <a:solidFill>
-            <a:srgbClr val="146B4A"/>
-          </a:solidFill>
+          <a:solidFill>val="007A55"/&gt;</a:solidFill>
           <a:ln>
             <a:noFill/>
           </a:ln>
@@ -10349,10 +10687,8 @@
             <a:pPr algn="ctr"/>
             <a:r>
               <a:rPr sz="2200" b="1" i="0">
-                <a:solidFill>
-                  <a:srgbClr val="BBBBBB"/>
-                </a:solidFill>
-                <a:latin typeface="Calibri"/>
+                <a:solidFill>val="9AA7B6"/&gt;</a:solidFill>
+                <a:latin typeface="Poppins"/>
               </a:rPr>
               <a:t>Section 3</a:t>
             </a:r>
@@ -10384,10 +10720,8 @@
             <a:pPr algn="ctr"/>
             <a:r>
               <a:rPr sz="2800" b="1" i="0">
-                <a:solidFill>
-                  <a:srgbClr val="FFD700"/>
-                </a:solidFill>
-                <a:latin typeface="Calibri"/>
+                <a:solidFill>val="F0B429"/&gt;</a:solidFill>
+                <a:latin typeface="Poppins"/>
               </a:rPr>
               <a:t>Le Bureau et la Barre des tâches</a:t>
             </a:r>
@@ -10418,6 +10752,47 @@
           </a:prstGeom>
         </p:spPr>
       </p:pic>
+      <p:sp>
+        <p:nvSpPr>
+          <p:cNvPr id="990001" name="Pied de page FLE"/>
+          <p:cNvSpPr>
+            <a:spLocks noGrp="1"/>
+          </p:cNvSpPr>
+          <p:nvPr/>
+        </p:nvSpPr>
+        <p:spPr>
+          <a:xfrm>
+            <a:off x="4343400" y="-329184"/>
+            <a:ext cx="4572000" cy="274320"/>
+          </a:xfrm>
+          <a:prstGeom prst="rect">
+            <a:avLst/>
+          </a:prstGeom>
+        </p:spPr>
+        <p:txBody>
+          <a:bodyPr anchor="b"/>
+          <a:lstStyle/>
+          <a:p>
+            <a:pPr algn="r">
+              <a:defRPr sz="900">
+                <a:solidFill>
+                  <a:srgbClr val="9AA7B6"/>
+                </a:solidFill>
+                <a:latin typeface="Poppins"/>
+              </a:defRPr>
+            </a:pPr>
+            <a:r>
+              <a:rPr lang="fr-FR" sz="900">
+                <a:solidFill>
+                  <a:srgbClr val="9AA7B6"/>
+                </a:solidFill>
+                <a:latin typeface="Poppins"/>
+              </a:rPr>
+              <a:t>Université de Mostaganem — Dr. Madani BELACEL</a:t>
+            </a:r>
+          </a:p>
+        </p:txBody>
+      </p:sp>
     </p:spTree>
   </p:cSld>
   <p:clrMapOvr>
@@ -10431,9 +10806,7 @@
   <p:cSld>
     <p:bg>
       <p:bgPr>
-        <a:solidFill>
-          <a:srgbClr val="0B3D2E"/>
-        </a:solidFill>
+        <a:solidFill>val="004A38"/&gt;</a:solidFill>
         <a:effectLst/>
       </p:bgPr>
     </p:bg>
@@ -10458,9 +10831,7 @@
           <a:prstGeom prst="rect">
             <a:avLst/>
           </a:prstGeom>
-          <a:solidFill>
-            <a:srgbClr val="146B4A"/>
-          </a:solidFill>
+          <a:solidFill>val="007A55"/&gt;</a:solidFill>
           <a:ln>
             <a:noFill/>
           </a:ln>
@@ -10502,9 +10873,7 @@
           <a:prstGeom prst="rect">
             <a:avLst/>
           </a:prstGeom>
-          <a:solidFill>
-            <a:srgbClr val="FFD700"/>
-          </a:solidFill>
+          <a:solidFill>val="F0B429"/&gt;</a:solidFill>
           <a:ln>
             <a:noFill/>
           </a:ln>
@@ -10546,9 +10915,7 @@
           <a:prstGeom prst="rect">
             <a:avLst/>
           </a:prstGeom>
-          <a:solidFill>
-            <a:srgbClr val="FFD700"/>
-          </a:solidFill>
+          <a:solidFill>val="F0B429"/&gt;</a:solidFill>
           <a:ln>
             <a:noFill/>
           </a:ln>
@@ -10590,9 +10957,7 @@
           <a:prstGeom prst="rect">
             <a:avLst/>
           </a:prstGeom>
-          <a:solidFill>
-            <a:srgbClr val="146B4A"/>
-          </a:solidFill>
+          <a:solidFill>val="007A55"/&gt;</a:solidFill>
           <a:ln>
             <a:noFill/>
           </a:ln>
@@ -10645,10 +11010,8 @@
             <a:pPr algn="l"/>
             <a:r>
               <a:rPr sz="2400" b="1" i="0">
-                <a:solidFill>
-                  <a:srgbClr val="FFD700"/>
-                </a:solidFill>
-                <a:latin typeface="Calibri"/>
+                <a:solidFill>val="F0B429"/&gt;</a:solidFill>
+                <a:latin typeface="Poppins"/>
               </a:rPr>
               <a:t>3 - Le Bureau et la Barre des tâches</a:t>
             </a:r>
@@ -10669,9 +11032,7 @@
           <a:prstGeom prst="rect">
             <a:avLst/>
           </a:prstGeom>
-          <a:solidFill>
-            <a:srgbClr val="146B4A"/>
-          </a:solidFill>
+          <a:solidFill>val="007A55"/&gt;</a:solidFill>
           <a:ln>
             <a:noFill/>
           </a:ln>
@@ -10728,10 +11089,8 @@
             </a:pPr>
             <a:r>
               <a:rPr sz="1800">
-                <a:solidFill>
-                  <a:srgbClr val="FFFFFF"/>
-                </a:solidFill>
-                <a:latin typeface="Calibri"/>
+                <a:solidFill>val="FFFFFF"/&gt;</a:solidFill>
+                <a:latin typeface="Poppins"/>
               </a:rPr>
               <a:t>▪  Bureau : espace de travail principal avec icônes et raccourcis.</a:t>
             </a:r>
@@ -10744,10 +11103,8 @@
             </a:pPr>
             <a:r>
               <a:rPr sz="1800">
-                <a:solidFill>
-                  <a:srgbClr val="FFFFFF"/>
-                </a:solidFill>
-                <a:latin typeface="Calibri"/>
+                <a:solidFill>val="FFFFFF"/&gt;</a:solidFill>
+                <a:latin typeface="Poppins"/>
               </a:rPr>
               <a:t>▪  Barre des tâches : applications ouvertes, zone de notification.</a:t>
             </a:r>
@@ -10760,10 +11117,8 @@
             </a:pPr>
             <a:r>
               <a:rPr sz="1800">
-                <a:solidFill>
-                  <a:srgbClr val="FFFFFF"/>
-                </a:solidFill>
-                <a:latin typeface="Calibri"/>
+                <a:solidFill>val="FFFFFF"/&gt;</a:solidFill>
+                <a:latin typeface="Poppins"/>
               </a:rPr>
               <a:t>▪  Menu Démarrer : accès aux programmes et réglages.</a:t>
             </a:r>
@@ -10776,10 +11131,8 @@
             </a:pPr>
             <a:r>
               <a:rPr sz="1800">
-                <a:solidFill>
-                  <a:srgbClr val="FFFFFF"/>
-                </a:solidFill>
-                <a:latin typeface="Calibri"/>
+                <a:solidFill>val="FFFFFF"/&gt;</a:solidFill>
+                <a:latin typeface="Poppins"/>
               </a:rPr>
               <a:t>▪  Corbeille : récupération ou suppression définitive de fichiers.</a:t>
             </a:r>
@@ -10810,6 +11163,47 @@
           </a:prstGeom>
         </p:spPr>
       </p:pic>
+      <p:sp>
+        <p:nvSpPr>
+          <p:cNvPr id="990001" name="Pied de page FLE"/>
+          <p:cNvSpPr>
+            <a:spLocks noGrp="1"/>
+          </p:cNvSpPr>
+          <p:nvPr/>
+        </p:nvSpPr>
+        <p:spPr>
+          <a:xfrm>
+            <a:off x="4343400" y="-329184"/>
+            <a:ext cx="4572000" cy="274320"/>
+          </a:xfrm>
+          <a:prstGeom prst="rect">
+            <a:avLst/>
+          </a:prstGeom>
+        </p:spPr>
+        <p:txBody>
+          <a:bodyPr anchor="b"/>
+          <a:lstStyle/>
+          <a:p>
+            <a:pPr algn="r">
+              <a:defRPr sz="900">
+                <a:solidFill>
+                  <a:srgbClr val="9AA7B6"/>
+                </a:solidFill>
+                <a:latin typeface="Poppins"/>
+              </a:defRPr>
+            </a:pPr>
+            <a:r>
+              <a:rPr lang="fr-FR" sz="900">
+                <a:solidFill>
+                  <a:srgbClr val="9AA7B6"/>
+                </a:solidFill>
+                <a:latin typeface="Poppins"/>
+              </a:rPr>
+              <a:t>Université de Mostaganem — Dr. Madani BELACEL</a:t>
+            </a:r>
+          </a:p>
+        </p:txBody>
+      </p:sp>
     </p:spTree>
   </p:cSld>
   <p:clrMapOvr>
@@ -10823,9 +11217,7 @@
   <p:cSld>
     <p:bg>
       <p:bgPr>
-        <a:solidFill>
-          <a:srgbClr val="0B3D2E"/>
-        </a:solidFill>
+        <a:solidFill>val="004A38"/&gt;</a:solidFill>
         <a:effectLst/>
       </p:bgPr>
     </p:bg>
@@ -10850,9 +11242,7 @@
           <a:prstGeom prst="rect">
             <a:avLst/>
           </a:prstGeom>
-          <a:solidFill>
-            <a:srgbClr val="146B4A"/>
-          </a:solidFill>
+          <a:solidFill>val="007A55"/&gt;</a:solidFill>
           <a:ln>
             <a:noFill/>
           </a:ln>
@@ -10894,9 +11284,7 @@
           <a:prstGeom prst="rect">
             <a:avLst/>
           </a:prstGeom>
-          <a:solidFill>
-            <a:srgbClr val="FFD700"/>
-          </a:solidFill>
+          <a:solidFill>val="F0B429"/&gt;</a:solidFill>
           <a:ln>
             <a:noFill/>
           </a:ln>
@@ -10938,9 +11326,7 @@
           <a:prstGeom prst="rect">
             <a:avLst/>
           </a:prstGeom>
-          <a:solidFill>
-            <a:srgbClr val="FFD700"/>
-          </a:solidFill>
+          <a:solidFill>val="F0B429"/&gt;</a:solidFill>
           <a:ln>
             <a:noFill/>
           </a:ln>
@@ -10982,9 +11368,7 @@
           <a:prstGeom prst="rect">
             <a:avLst/>
           </a:prstGeom>
-          <a:solidFill>
-            <a:srgbClr val="146B4A"/>
-          </a:solidFill>
+          <a:solidFill>val="007A55"/&gt;</a:solidFill>
           <a:ln>
             <a:noFill/>
           </a:ln>
@@ -11026,9 +11410,7 @@
           <a:prstGeom prst="rect">
             <a:avLst/>
           </a:prstGeom>
-          <a:solidFill>
-            <a:srgbClr val="146B4A"/>
-          </a:solidFill>
+          <a:solidFill>val="007A55"/&gt;</a:solidFill>
           <a:ln>
             <a:noFill/>
           </a:ln>
@@ -11081,10 +11463,8 @@
             <a:pPr algn="ctr"/>
             <a:r>
               <a:rPr sz="2200" b="1" i="0">
-                <a:solidFill>
-                  <a:srgbClr val="BBBBBB"/>
-                </a:solidFill>
-                <a:latin typeface="Calibri"/>
+                <a:solidFill>val="9AA7B6"/&gt;</a:solidFill>
+                <a:latin typeface="Poppins"/>
               </a:rPr>
               <a:t>Section 4</a:t>
             </a:r>
@@ -11116,10 +11496,8 @@
             <a:pPr algn="ctr"/>
             <a:r>
               <a:rPr sz="2800" b="1" i="0">
-                <a:solidFill>
-                  <a:srgbClr val="FFD700"/>
-                </a:solidFill>
-                <a:latin typeface="Calibri"/>
+                <a:solidFill>val="F0B429"/&gt;</a:solidFill>
+                <a:latin typeface="Poppins"/>
               </a:rPr>
               <a:t>Gestion des fichiers et dossiers</a:t>
             </a:r>
@@ -11150,6 +11528,47 @@
           </a:prstGeom>
         </p:spPr>
       </p:pic>
+      <p:sp>
+        <p:nvSpPr>
+          <p:cNvPr id="990001" name="Pied de page FLE"/>
+          <p:cNvSpPr>
+            <a:spLocks noGrp="1"/>
+          </p:cNvSpPr>
+          <p:nvPr/>
+        </p:nvSpPr>
+        <p:spPr>
+          <a:xfrm>
+            <a:off x="4343400" y="-329184"/>
+            <a:ext cx="4572000" cy="274320"/>
+          </a:xfrm>
+          <a:prstGeom prst="rect">
+            <a:avLst/>
+          </a:prstGeom>
+        </p:spPr>
+        <p:txBody>
+          <a:bodyPr anchor="b"/>
+          <a:lstStyle/>
+          <a:p>
+            <a:pPr algn="r">
+              <a:defRPr sz="900">
+                <a:solidFill>
+                  <a:srgbClr val="9AA7B6"/>
+                </a:solidFill>
+                <a:latin typeface="Poppins"/>
+              </a:defRPr>
+            </a:pPr>
+            <a:r>
+              <a:rPr lang="fr-FR" sz="900">
+                <a:solidFill>
+                  <a:srgbClr val="9AA7B6"/>
+                </a:solidFill>
+                <a:latin typeface="Poppins"/>
+              </a:rPr>
+              <a:t>Université de Mostaganem — Dr. Madani BELACEL</a:t>
+            </a:r>
+          </a:p>
+        </p:txBody>
+      </p:sp>
     </p:spTree>
   </p:cSld>
   <p:clrMapOvr>
@@ -11201,7 +11620,7 @@
     </a:clrScheme>
     <a:fontScheme name="Office">
       <a:majorFont>
-        <a:latin typeface="Calibri"/>
+        <a:latin typeface="Poppins"/>
         <a:ea typeface=""/>
         <a:cs typeface=""/>
         <a:font script="Jpan" typeface="ＭＳ Ｐゴシック"/>
@@ -11236,7 +11655,7 @@
         <a:font script="Geor" typeface="Sylfaen"/>
       </a:majorFont>
       <a:minorFont>
-        <a:latin typeface="Calibri"/>
+        <a:latin typeface="Poppins"/>
         <a:ea typeface=""/>
         <a:cs typeface=""/>
         <a:font script="Jpan" typeface="ＭＳ Ｐゴシック"/>
